--- a/WEWereOnce7_presentation.pptx
+++ b/WEWereOnce7_presentation.pptx
@@ -821,7 +821,7 @@
   <p:cSld>
     <p:spTree>
       <p:nvGrpSpPr>
-        <p:cNvPr id="311" name="Shape 311"/>
+        <p:cNvPr id="312" name="Shape 312"/>
         <p:cNvGrpSpPr/>
         <p:nvPr/>
       </p:nvGrpSpPr>
@@ -835,7 +835,7 @@
       </p:grpSpPr>
       <p:sp>
         <p:nvSpPr>
-          <p:cNvPr id="312" name="Google Shape;312;g3976c68fa5e_0_33:notes"/>
+          <p:cNvPr id="313" name="Google Shape;313;g3976c68fa5e_0_33:notes"/>
           <p:cNvSpPr/>
           <p:nvPr>
             <p:ph idx="2" type="sldImg"/>
@@ -870,7 +870,7 @@
       </p:sp>
       <p:sp>
         <p:nvSpPr>
-          <p:cNvPr id="313" name="Google Shape;313;g3976c68fa5e_0_33:notes"/>
+          <p:cNvPr id="314" name="Google Shape;314;g3976c68fa5e_0_33:notes"/>
           <p:cNvSpPr txBox="1"/>
           <p:nvPr>
             <p:ph idx="1" type="body"/>
@@ -1317,7 +1317,7 @@
   <p:cSld>
     <p:spTree>
       <p:nvGrpSpPr>
-        <p:cNvPr id="166" name="Shape 166"/>
+        <p:cNvPr id="167" name="Shape 167"/>
         <p:cNvGrpSpPr/>
         <p:nvPr/>
       </p:nvGrpSpPr>
@@ -1331,7 +1331,7 @@
       </p:grpSpPr>
       <p:sp>
         <p:nvSpPr>
-          <p:cNvPr id="167" name="Google Shape;167;g3976c68fa5e_2_0:notes"/>
+          <p:cNvPr id="168" name="Google Shape;168;g3976c68fa5e_2_0:notes"/>
           <p:cNvSpPr/>
           <p:nvPr>
             <p:ph idx="2" type="sldImg"/>
@@ -1366,7 +1366,7 @@
       </p:sp>
       <p:sp>
         <p:nvSpPr>
-          <p:cNvPr id="168" name="Google Shape;168;g3976c68fa5e_2_0:notes"/>
+          <p:cNvPr id="169" name="Google Shape;169;g3976c68fa5e_2_0:notes"/>
           <p:cNvSpPr txBox="1"/>
           <p:nvPr>
             <p:ph idx="1" type="body"/>
@@ -1417,7 +1417,7 @@
   <p:cSld>
     <p:spTree>
       <p:nvGrpSpPr>
-        <p:cNvPr id="190" name="Shape 190"/>
+        <p:cNvPr id="191" name="Shape 191"/>
         <p:cNvGrpSpPr/>
         <p:nvPr/>
       </p:nvGrpSpPr>
@@ -1431,7 +1431,7 @@
       </p:grpSpPr>
       <p:sp>
         <p:nvSpPr>
-          <p:cNvPr id="191" name="Google Shape;191;g3976c68fa5e_6_171:notes"/>
+          <p:cNvPr id="192" name="Google Shape;192;g3976c68fa5e_6_171:notes"/>
           <p:cNvSpPr/>
           <p:nvPr>
             <p:ph idx="2" type="sldImg"/>
@@ -1466,7 +1466,7 @@
       </p:sp>
       <p:sp>
         <p:nvSpPr>
-          <p:cNvPr id="192" name="Google Shape;192;g3976c68fa5e_6_171:notes"/>
+          <p:cNvPr id="193" name="Google Shape;193;g3976c68fa5e_6_171:notes"/>
           <p:cNvSpPr txBox="1"/>
           <p:nvPr>
             <p:ph idx="1" type="body"/>
@@ -1516,7 +1516,7 @@
   <p:cSld>
     <p:spTree>
       <p:nvGrpSpPr>
-        <p:cNvPr id="226" name="Shape 226"/>
+        <p:cNvPr id="227" name="Shape 227"/>
         <p:cNvGrpSpPr/>
         <p:nvPr/>
       </p:nvGrpSpPr>
@@ -1530,7 +1530,7 @@
       </p:grpSpPr>
       <p:sp>
         <p:nvSpPr>
-          <p:cNvPr id="227" name="Google Shape;227;g3976c68fa5e_17_45:notes"/>
+          <p:cNvPr id="228" name="Google Shape;228;g3976c68fa5e_17_45:notes"/>
           <p:cNvSpPr/>
           <p:nvPr>
             <p:ph idx="2" type="sldImg"/>
@@ -1575,7 +1575,7 @@
       </p:sp>
       <p:sp>
         <p:nvSpPr>
-          <p:cNvPr id="228" name="Google Shape;228;g3976c68fa5e_17_45:notes"/>
+          <p:cNvPr id="229" name="Google Shape;229;g3976c68fa5e_17_45:notes"/>
           <p:cNvSpPr txBox="1"/>
           <p:nvPr>
             <p:ph idx="1" type="body"/>
@@ -1634,7 +1634,7 @@
   <p:cSld>
     <p:spTree>
       <p:nvGrpSpPr>
-        <p:cNvPr id="267" name="Shape 267"/>
+        <p:cNvPr id="268" name="Shape 268"/>
         <p:cNvGrpSpPr/>
         <p:nvPr/>
       </p:nvGrpSpPr>
@@ -1648,7 +1648,7 @@
       </p:grpSpPr>
       <p:sp>
         <p:nvSpPr>
-          <p:cNvPr id="268" name="Google Shape;268;g3976c68fa5e_6_127:notes"/>
+          <p:cNvPr id="269" name="Google Shape;269;g3976c68fa5e_6_127:notes"/>
           <p:cNvSpPr/>
           <p:nvPr>
             <p:ph idx="2" type="sldImg"/>
@@ -1683,7 +1683,7 @@
       </p:sp>
       <p:sp>
         <p:nvSpPr>
-          <p:cNvPr id="269" name="Google Shape;269;g3976c68fa5e_6_127:notes"/>
+          <p:cNvPr id="270" name="Google Shape;270;g3976c68fa5e_6_127:notes"/>
           <p:cNvSpPr txBox="1"/>
           <p:nvPr>
             <p:ph idx="1" type="body"/>
@@ -14232,7 +14232,7 @@
   <p:cSld>
     <p:spTree>
       <p:nvGrpSpPr>
-        <p:cNvPr id="314" name="Shape 314"/>
+        <p:cNvPr id="315" name="Shape 315"/>
         <p:cNvGrpSpPr/>
         <p:nvPr/>
       </p:nvGrpSpPr>
@@ -14246,7 +14246,7 @@
       </p:grpSpPr>
       <p:sp>
         <p:nvSpPr>
-          <p:cNvPr id="315" name="Google Shape;315;p34"/>
+          <p:cNvPr id="316" name="Google Shape;316;p34"/>
           <p:cNvSpPr txBox="1"/>
           <p:nvPr>
             <p:ph type="title"/>
@@ -17618,6 +17618,34 @@
           </a:p>
         </p:txBody>
       </p:sp>
+      <p:pic>
+        <p:nvPicPr>
+          <p:cNvPr id="166" name="Google Shape;166;p29"/>
+          <p:cNvPicPr preferRelativeResize="0"/>
+          <p:nvPr/>
+        </p:nvPicPr>
+        <p:blipFill>
+          <a:blip r:embed="rId3">
+            <a:alphaModFix/>
+          </a:blip>
+          <a:stretch>
+            <a:fillRect/>
+          </a:stretch>
+        </p:blipFill>
+        <p:spPr>
+          <a:xfrm>
+            <a:off x="2245713" y="445025"/>
+            <a:ext cx="4652577" cy="4698476"/>
+          </a:xfrm>
+          <a:prstGeom prst="rect">
+            <a:avLst/>
+          </a:prstGeom>
+          <a:noFill/>
+          <a:ln>
+            <a:noFill/>
+          </a:ln>
+        </p:spPr>
+      </p:pic>
     </p:spTree>
   </p:cSld>
   <p:clrMapOvr>
@@ -17631,7 +17659,7 @@
   <p:cSld>
     <p:spTree>
       <p:nvGrpSpPr>
-        <p:cNvPr id="169" name="Shape 169"/>
+        <p:cNvPr id="170" name="Shape 170"/>
         <p:cNvGrpSpPr/>
         <p:nvPr/>
       </p:nvGrpSpPr>
@@ -17645,7 +17673,7 @@
       </p:grpSpPr>
       <p:pic>
         <p:nvPicPr>
-          <p:cNvPr id="170" name="Google Shape;170;p30" title="09b2eb18-928e-d3cf-b7a6-ac99810746b6.jpg"/>
+          <p:cNvPr id="171" name="Google Shape;171;p30" title="09b2eb18-928e-d3cf-b7a6-ac99810746b6.jpg"/>
           <p:cNvPicPr preferRelativeResize="0"/>
           <p:nvPr/>
         </p:nvPicPr>
@@ -17673,7 +17701,7 @@
       </p:pic>
       <p:sp>
         <p:nvSpPr>
-          <p:cNvPr id="171" name="Google Shape;171;p30"/>
+          <p:cNvPr id="172" name="Google Shape;172;p30"/>
           <p:cNvSpPr txBox="1"/>
           <p:nvPr>
             <p:ph type="title"/>
@@ -17713,7 +17741,7 @@
       </p:sp>
       <p:sp>
         <p:nvSpPr>
-          <p:cNvPr id="172" name="Google Shape;172;p30"/>
+          <p:cNvPr id="173" name="Google Shape;173;p30"/>
           <p:cNvSpPr/>
           <p:nvPr/>
         </p:nvSpPr>
@@ -17761,7 +17789,7 @@
       </p:sp>
       <p:sp>
         <p:nvSpPr>
-          <p:cNvPr id="173" name="Google Shape;173;p30"/>
+          <p:cNvPr id="174" name="Google Shape;174;p30"/>
           <p:cNvSpPr/>
           <p:nvPr/>
         </p:nvSpPr>
@@ -17809,7 +17837,7 @@
       </p:sp>
       <p:sp>
         <p:nvSpPr>
-          <p:cNvPr id="174" name="Google Shape;174;p30"/>
+          <p:cNvPr id="175" name="Google Shape;175;p30"/>
           <p:cNvSpPr/>
           <p:nvPr/>
         </p:nvSpPr>
@@ -17857,7 +17885,7 @@
       </p:sp>
       <p:sp>
         <p:nvSpPr>
-          <p:cNvPr id="175" name="Google Shape;175;p30"/>
+          <p:cNvPr id="176" name="Google Shape;176;p30"/>
           <p:cNvSpPr/>
           <p:nvPr/>
         </p:nvSpPr>
@@ -17905,7 +17933,7 @@
       </p:sp>
       <p:sp>
         <p:nvSpPr>
-          <p:cNvPr id="176" name="Google Shape;176;p30"/>
+          <p:cNvPr id="177" name="Google Shape;177;p30"/>
           <p:cNvSpPr/>
           <p:nvPr/>
         </p:nvSpPr>
@@ -17953,7 +17981,7 @@
       </p:sp>
       <p:pic>
         <p:nvPicPr>
-          <p:cNvPr id="177" name="Google Shape;177;p30" title="8affae55-2bca-7b22-ca58-3ef6ecf732ba.jpg"/>
+          <p:cNvPr id="178" name="Google Shape;178;p30" title="8affae55-2bca-7b22-ca58-3ef6ecf732ba.jpg"/>
           <p:cNvPicPr preferRelativeResize="0"/>
           <p:nvPr/>
         </p:nvPicPr>
@@ -17981,7 +18009,7 @@
       </p:pic>
       <p:pic>
         <p:nvPicPr>
-          <p:cNvPr id="178" name="Google Shape;178;p30" title="c36dafe9-b6ef-5324-759c-f8a50bd01846.jpg"/>
+          <p:cNvPr id="179" name="Google Shape;179;p30" title="c36dafe9-b6ef-5324-759c-f8a50bd01846.jpg"/>
           <p:cNvPicPr preferRelativeResize="0"/>
           <p:nvPr/>
         </p:nvPicPr>
@@ -18009,9 +18037,9 @@
       </p:pic>
       <p:cxnSp>
         <p:nvCxnSpPr>
-          <p:cNvPr id="179" name="Google Shape;179;p30"/>
+          <p:cNvPr id="180" name="Google Shape;180;p30"/>
           <p:cNvCxnSpPr>
-            <a:endCxn id="175" idx="3"/>
+            <a:endCxn id="176" idx="3"/>
           </p:cNvCxnSpPr>
           <p:nvPr/>
         </p:nvCxnSpPr>
@@ -18037,7 +18065,7 @@
       </p:cxnSp>
       <p:cxnSp>
         <p:nvCxnSpPr>
-          <p:cNvPr id="180" name="Google Shape;180;p30"/>
+          <p:cNvPr id="181" name="Google Shape;181;p30"/>
           <p:cNvCxnSpPr/>
           <p:nvPr/>
         </p:nvCxnSpPr>
@@ -18063,9 +18091,9 @@
       </p:cxnSp>
       <p:cxnSp>
         <p:nvCxnSpPr>
-          <p:cNvPr id="181" name="Google Shape;181;p30"/>
+          <p:cNvPr id="182" name="Google Shape;182;p30"/>
           <p:cNvCxnSpPr>
-            <a:endCxn id="173" idx="3"/>
+            <a:endCxn id="174" idx="3"/>
           </p:cNvCxnSpPr>
           <p:nvPr/>
         </p:nvCxnSpPr>
@@ -18091,7 +18119,7 @@
       </p:cxnSp>
       <p:sp>
         <p:nvSpPr>
-          <p:cNvPr id="182" name="Google Shape;182;p30"/>
+          <p:cNvPr id="183" name="Google Shape;183;p30"/>
           <p:cNvSpPr/>
           <p:nvPr/>
         </p:nvSpPr>
@@ -18139,7 +18167,7 @@
       </p:sp>
       <p:sp>
         <p:nvSpPr>
-          <p:cNvPr id="183" name="Google Shape;183;p30"/>
+          <p:cNvPr id="184" name="Google Shape;184;p30"/>
           <p:cNvSpPr/>
           <p:nvPr/>
         </p:nvSpPr>
@@ -18187,7 +18215,7 @@
       </p:sp>
       <p:sp>
         <p:nvSpPr>
-          <p:cNvPr id="184" name="Google Shape;184;p30"/>
+          <p:cNvPr id="185" name="Google Shape;185;p30"/>
           <p:cNvSpPr/>
           <p:nvPr/>
         </p:nvSpPr>
@@ -18235,7 +18263,7 @@
       </p:sp>
       <p:sp>
         <p:nvSpPr>
-          <p:cNvPr id="185" name="Google Shape;185;p30"/>
+          <p:cNvPr id="186" name="Google Shape;186;p30"/>
           <p:cNvSpPr txBox="1"/>
           <p:nvPr/>
         </p:nvSpPr>
@@ -18293,9 +18321,9 @@
       </p:sp>
       <p:cxnSp>
         <p:nvCxnSpPr>
-          <p:cNvPr id="186" name="Google Shape;186;p30"/>
+          <p:cNvPr id="187" name="Google Shape;187;p30"/>
           <p:cNvCxnSpPr>
-            <a:stCxn id="185" idx="3"/>
+            <a:stCxn id="186" idx="3"/>
           </p:cNvCxnSpPr>
           <p:nvPr/>
         </p:nvCxnSpPr>
@@ -18321,7 +18349,7 @@
       </p:cxnSp>
       <p:cxnSp>
         <p:nvCxnSpPr>
-          <p:cNvPr id="187" name="Google Shape;187;p30"/>
+          <p:cNvPr id="188" name="Google Shape;188;p30"/>
           <p:cNvCxnSpPr/>
           <p:nvPr/>
         </p:nvCxnSpPr>
@@ -18347,7 +18375,7 @@
       </p:cxnSp>
       <p:sp>
         <p:nvSpPr>
-          <p:cNvPr id="188" name="Google Shape;188;p30"/>
+          <p:cNvPr id="189" name="Google Shape;189;p30"/>
           <p:cNvSpPr txBox="1"/>
           <p:nvPr/>
         </p:nvSpPr>
@@ -18586,7 +18614,7 @@
       </p:sp>
       <p:sp>
         <p:nvSpPr>
-          <p:cNvPr id="189" name="Google Shape;189;p30"/>
+          <p:cNvPr id="190" name="Google Shape;190;p30"/>
           <p:cNvSpPr txBox="1"/>
           <p:nvPr>
             <p:ph type="title"/>
@@ -18642,7 +18670,7 @@
   <p:cSld>
     <p:spTree>
       <p:nvGrpSpPr>
-        <p:cNvPr id="193" name="Shape 193"/>
+        <p:cNvPr id="194" name="Shape 194"/>
         <p:cNvGrpSpPr/>
         <p:nvPr/>
       </p:nvGrpSpPr>
@@ -18656,7 +18684,7 @@
       </p:grpSpPr>
       <p:sp>
         <p:nvSpPr>
-          <p:cNvPr id="194" name="Google Shape;194;p31"/>
+          <p:cNvPr id="195" name="Google Shape;195;p31"/>
           <p:cNvSpPr/>
           <p:nvPr/>
         </p:nvSpPr>
@@ -18701,7 +18729,7 @@
       </p:sp>
       <p:sp>
         <p:nvSpPr>
-          <p:cNvPr id="195" name="Google Shape;195;p31"/>
+          <p:cNvPr id="196" name="Google Shape;196;p31"/>
           <p:cNvSpPr/>
           <p:nvPr/>
         </p:nvSpPr>
@@ -18746,7 +18774,7 @@
       </p:sp>
       <p:sp>
         <p:nvSpPr>
-          <p:cNvPr id="196" name="Google Shape;196;p31"/>
+          <p:cNvPr id="197" name="Google Shape;197;p31"/>
           <p:cNvSpPr/>
           <p:nvPr/>
         </p:nvSpPr>
@@ -18797,7 +18825,7 @@
       </p:sp>
       <p:sp>
         <p:nvSpPr>
-          <p:cNvPr id="197" name="Google Shape;197;p31"/>
+          <p:cNvPr id="198" name="Google Shape;198;p31"/>
           <p:cNvSpPr/>
           <p:nvPr/>
         </p:nvSpPr>
@@ -18850,64 +18878,6 @@
               <a:t>1</a:t>
             </a:r>
             <a:endParaRPr b="0" i="0" sz="1691" u="none" cap="none" strike="noStrike"/>
-          </a:p>
-        </p:txBody>
-      </p:sp>
-      <p:sp>
-        <p:nvSpPr>
-          <p:cNvPr id="198" name="Google Shape;198;p31"/>
-          <p:cNvSpPr/>
-          <p:nvPr/>
-        </p:nvSpPr>
-        <p:spPr>
-          <a:xfrm>
-            <a:off x="2002966" y="847698"/>
-            <a:ext cx="1834800" cy="229200"/>
-          </a:xfrm>
-          <a:prstGeom prst="rect">
-            <a:avLst/>
-          </a:prstGeom>
-          <a:noFill/>
-          <a:ln>
-            <a:noFill/>
-          </a:ln>
-        </p:spPr>
-        <p:txBody>
-          <a:bodyPr anchorCtr="0" anchor="t" bIns="0" lIns="0" spcFirstLastPara="1" rIns="0" wrap="square" tIns="0">
-            <a:noAutofit/>
-          </a:bodyPr>
-          <a:lstStyle/>
-          <a:p>
-            <a:pPr indent="0" lvl="0" marL="0" marR="0" rtl="0" algn="r">
-              <a:lnSpc>
-                <a:spcPct val="125925"/>
-              </a:lnSpc>
-              <a:spcBef>
-                <a:spcPts val="0"/>
-              </a:spcBef>
-              <a:spcAft>
-                <a:spcPts val="0"/>
-              </a:spcAft>
-              <a:buClr>
-                <a:srgbClr val="272525"/>
-              </a:buClr>
-              <a:buSzPts val="1427"/>
-              <a:buFont typeface="Inter"/>
-              <a:buNone/>
-            </a:pPr>
-            <a:r>
-              <a:rPr b="1" i="0" lang="en-GB" sz="1427" u="none" cap="none" strike="noStrike">
-                <a:solidFill>
-                  <a:srgbClr val="272525"/>
-                </a:solidFill>
-                <a:latin typeface="Inter"/>
-                <a:ea typeface="Inter"/>
-                <a:cs typeface="Inter"/>
-                <a:sym typeface="Inter"/>
-              </a:rPr>
-              <a:t>Extract Preferences</a:t>
-            </a:r>
-            <a:endParaRPr b="0" i="0" sz="1427" u="none" cap="none" strike="noStrike"/>
           </a:p>
         </p:txBody>
       </p:sp>
@@ -18919,8 +18889,8 @@
         </p:nvSpPr>
         <p:spPr>
           <a:xfrm>
-            <a:off x="388113" y="1126491"/>
-            <a:ext cx="3449700" cy="183300"/>
+            <a:off x="2002966" y="847698"/>
+            <a:ext cx="1834800" cy="229200"/>
           </a:xfrm>
           <a:prstGeom prst="rect">
             <a:avLst/>
@@ -18938,6 +18908,64 @@
           <a:p>
             <a:pPr indent="0" lvl="0" marL="0" marR="0" rtl="0" algn="r">
               <a:lnSpc>
+                <a:spcPct val="125925"/>
+              </a:lnSpc>
+              <a:spcBef>
+                <a:spcPts val="0"/>
+              </a:spcBef>
+              <a:spcAft>
+                <a:spcPts val="0"/>
+              </a:spcAft>
+              <a:buClr>
+                <a:srgbClr val="272525"/>
+              </a:buClr>
+              <a:buSzPts val="1427"/>
+              <a:buFont typeface="Inter"/>
+              <a:buNone/>
+            </a:pPr>
+            <a:r>
+              <a:rPr b="1" i="0" lang="en-GB" sz="1427" u="none" cap="none" strike="noStrike">
+                <a:solidFill>
+                  <a:srgbClr val="272525"/>
+                </a:solidFill>
+                <a:latin typeface="Inter"/>
+                <a:ea typeface="Inter"/>
+                <a:cs typeface="Inter"/>
+                <a:sym typeface="Inter"/>
+              </a:rPr>
+              <a:t>Extract Preferences</a:t>
+            </a:r>
+            <a:endParaRPr b="0" i="0" sz="1427" u="none" cap="none" strike="noStrike"/>
+          </a:p>
+        </p:txBody>
+      </p:sp>
+      <p:sp>
+        <p:nvSpPr>
+          <p:cNvPr id="200" name="Google Shape;200;p31"/>
+          <p:cNvSpPr/>
+          <p:nvPr/>
+        </p:nvSpPr>
+        <p:spPr>
+          <a:xfrm>
+            <a:off x="388113" y="1126491"/>
+            <a:ext cx="3449700" cy="183300"/>
+          </a:xfrm>
+          <a:prstGeom prst="rect">
+            <a:avLst/>
+          </a:prstGeom>
+          <a:noFill/>
+          <a:ln>
+            <a:noFill/>
+          </a:ln>
+        </p:spPr>
+        <p:txBody>
+          <a:bodyPr anchorCtr="0" anchor="t" bIns="0" lIns="0" spcFirstLastPara="1" rIns="0" wrap="square" tIns="0">
+            <a:noAutofit/>
+          </a:bodyPr>
+          <a:lstStyle/>
+          <a:p>
+            <a:pPr indent="0" lvl="0" marL="0" marR="0" rtl="0" algn="r">
+              <a:lnSpc>
                 <a:spcPct val="128571"/>
               </a:lnSpc>
               <a:spcBef>
@@ -18971,7 +18999,7 @@
       </p:sp>
       <p:sp>
         <p:nvSpPr>
-          <p:cNvPr id="200" name="Google Shape;200;p31"/>
+          <p:cNvPr id="201" name="Google Shape;201;p31"/>
           <p:cNvSpPr/>
           <p:nvPr/>
         </p:nvSpPr>
@@ -19016,7 +19044,7 @@
       </p:sp>
       <p:sp>
         <p:nvSpPr>
-          <p:cNvPr id="201" name="Google Shape;201;p31"/>
+          <p:cNvPr id="202" name="Google Shape;202;p31"/>
           <p:cNvSpPr/>
           <p:nvPr/>
         </p:nvSpPr>
@@ -19067,7 +19095,7 @@
       </p:sp>
       <p:sp>
         <p:nvSpPr>
-          <p:cNvPr id="202" name="Google Shape;202;p31"/>
+          <p:cNvPr id="203" name="Google Shape;203;p31"/>
           <p:cNvSpPr/>
           <p:nvPr/>
         </p:nvSpPr>
@@ -19120,64 +19148,6 @@
               <a:t>2</a:t>
             </a:r>
             <a:endParaRPr b="0" i="0" sz="1691" u="none" cap="none" strike="noStrike"/>
-          </a:p>
-        </p:txBody>
-      </p:sp>
-      <p:sp>
-        <p:nvSpPr>
-          <p:cNvPr id="203" name="Google Shape;203;p31"/>
-          <p:cNvSpPr/>
-          <p:nvPr/>
-        </p:nvSpPr>
-        <p:spPr>
-          <a:xfrm>
-            <a:off x="5306178" y="1599997"/>
-            <a:ext cx="1834800" cy="229200"/>
-          </a:xfrm>
-          <a:prstGeom prst="rect">
-            <a:avLst/>
-          </a:prstGeom>
-          <a:noFill/>
-          <a:ln>
-            <a:noFill/>
-          </a:ln>
-        </p:spPr>
-        <p:txBody>
-          <a:bodyPr anchorCtr="0" anchor="t" bIns="0" lIns="0" spcFirstLastPara="1" rIns="0" wrap="square" tIns="0">
-            <a:noAutofit/>
-          </a:bodyPr>
-          <a:lstStyle/>
-          <a:p>
-            <a:pPr indent="0" lvl="0" marL="0" marR="0" rtl="0" algn="l">
-              <a:lnSpc>
-                <a:spcPct val="125925"/>
-              </a:lnSpc>
-              <a:spcBef>
-                <a:spcPts val="0"/>
-              </a:spcBef>
-              <a:spcAft>
-                <a:spcPts val="0"/>
-              </a:spcAft>
-              <a:buClr>
-                <a:srgbClr val="272525"/>
-              </a:buClr>
-              <a:buSzPts val="1427"/>
-              <a:buFont typeface="Inter"/>
-              <a:buNone/>
-            </a:pPr>
-            <a:r>
-              <a:rPr b="1" i="0" lang="en-GB" sz="1427" u="none" cap="none" strike="noStrike">
-                <a:solidFill>
-                  <a:srgbClr val="272525"/>
-                </a:solidFill>
-                <a:latin typeface="Inter"/>
-                <a:ea typeface="Inter"/>
-                <a:cs typeface="Inter"/>
-                <a:sym typeface="Inter"/>
-              </a:rPr>
-              <a:t>Assign Weights</a:t>
-            </a:r>
-            <a:endParaRPr b="0" i="0" sz="1427" u="none" cap="none" strike="noStrike"/>
           </a:p>
         </p:txBody>
       </p:sp>
@@ -19189,8 +19159,8 @@
         </p:nvSpPr>
         <p:spPr>
           <a:xfrm>
-            <a:off x="5306178" y="1878789"/>
-            <a:ext cx="3449700" cy="183300"/>
+            <a:off x="5306178" y="1599997"/>
+            <a:ext cx="1834800" cy="229200"/>
           </a:xfrm>
           <a:prstGeom prst="rect">
             <a:avLst/>
@@ -19208,6 +19178,64 @@
           <a:p>
             <a:pPr indent="0" lvl="0" marL="0" marR="0" rtl="0" algn="l">
               <a:lnSpc>
+                <a:spcPct val="125925"/>
+              </a:lnSpc>
+              <a:spcBef>
+                <a:spcPts val="0"/>
+              </a:spcBef>
+              <a:spcAft>
+                <a:spcPts val="0"/>
+              </a:spcAft>
+              <a:buClr>
+                <a:srgbClr val="272525"/>
+              </a:buClr>
+              <a:buSzPts val="1427"/>
+              <a:buFont typeface="Inter"/>
+              <a:buNone/>
+            </a:pPr>
+            <a:r>
+              <a:rPr b="1" i="0" lang="en-GB" sz="1427" u="none" cap="none" strike="noStrike">
+                <a:solidFill>
+                  <a:srgbClr val="272525"/>
+                </a:solidFill>
+                <a:latin typeface="Inter"/>
+                <a:ea typeface="Inter"/>
+                <a:cs typeface="Inter"/>
+                <a:sym typeface="Inter"/>
+              </a:rPr>
+              <a:t>Assign Weights</a:t>
+            </a:r>
+            <a:endParaRPr b="0" i="0" sz="1427" u="none" cap="none" strike="noStrike"/>
+          </a:p>
+        </p:txBody>
+      </p:sp>
+      <p:sp>
+        <p:nvSpPr>
+          <p:cNvPr id="205" name="Google Shape;205;p31"/>
+          <p:cNvSpPr/>
+          <p:nvPr/>
+        </p:nvSpPr>
+        <p:spPr>
+          <a:xfrm>
+            <a:off x="5306178" y="1878789"/>
+            <a:ext cx="3449700" cy="183300"/>
+          </a:xfrm>
+          <a:prstGeom prst="rect">
+            <a:avLst/>
+          </a:prstGeom>
+          <a:noFill/>
+          <a:ln>
+            <a:noFill/>
+          </a:ln>
+        </p:spPr>
+        <p:txBody>
+          <a:bodyPr anchorCtr="0" anchor="t" bIns="0" lIns="0" spcFirstLastPara="1" rIns="0" wrap="square" tIns="0">
+            <a:noAutofit/>
+          </a:bodyPr>
+          <a:lstStyle/>
+          <a:p>
+            <a:pPr indent="0" lvl="0" marL="0" marR="0" rtl="0" algn="l">
+              <a:lnSpc>
                 <a:spcPct val="128571"/>
               </a:lnSpc>
               <a:spcBef>
@@ -19241,7 +19269,7 @@
       </p:sp>
       <p:sp>
         <p:nvSpPr>
-          <p:cNvPr id="205" name="Google Shape;205;p31"/>
+          <p:cNvPr id="206" name="Google Shape;206;p31"/>
           <p:cNvSpPr/>
           <p:nvPr/>
         </p:nvSpPr>
@@ -19286,7 +19314,7 @@
       </p:sp>
       <p:sp>
         <p:nvSpPr>
-          <p:cNvPr id="206" name="Google Shape;206;p31"/>
+          <p:cNvPr id="207" name="Google Shape;207;p31"/>
           <p:cNvSpPr/>
           <p:nvPr/>
         </p:nvSpPr>
@@ -19337,7 +19365,7 @@
       </p:sp>
       <p:sp>
         <p:nvSpPr>
-          <p:cNvPr id="207" name="Google Shape;207;p31"/>
+          <p:cNvPr id="208" name="Google Shape;208;p31"/>
           <p:cNvSpPr/>
           <p:nvPr/>
         </p:nvSpPr>
@@ -19390,64 +19418,6 @@
               <a:t>3</a:t>
             </a:r>
             <a:endParaRPr b="0" i="0" sz="1691" u="none" cap="none" strike="noStrike"/>
-          </a:p>
-        </p:txBody>
-      </p:sp>
-      <p:sp>
-        <p:nvSpPr>
-          <p:cNvPr id="208" name="Google Shape;208;p31"/>
-          <p:cNvSpPr/>
-          <p:nvPr/>
-        </p:nvSpPr>
-        <p:spPr>
-          <a:xfrm>
-            <a:off x="2002966" y="2294901"/>
-            <a:ext cx="1834800" cy="229200"/>
-          </a:xfrm>
-          <a:prstGeom prst="rect">
-            <a:avLst/>
-          </a:prstGeom>
-          <a:noFill/>
-          <a:ln>
-            <a:noFill/>
-          </a:ln>
-        </p:spPr>
-        <p:txBody>
-          <a:bodyPr anchorCtr="0" anchor="t" bIns="0" lIns="0" spcFirstLastPara="1" rIns="0" wrap="square" tIns="0">
-            <a:noAutofit/>
-          </a:bodyPr>
-          <a:lstStyle/>
-          <a:p>
-            <a:pPr indent="0" lvl="0" marL="0" marR="0" rtl="0" algn="r">
-              <a:lnSpc>
-                <a:spcPct val="125925"/>
-              </a:lnSpc>
-              <a:spcBef>
-                <a:spcPts val="0"/>
-              </a:spcBef>
-              <a:spcAft>
-                <a:spcPts val="0"/>
-              </a:spcAft>
-              <a:buClr>
-                <a:srgbClr val="272525"/>
-              </a:buClr>
-              <a:buSzPts val="1427"/>
-              <a:buFont typeface="Inter"/>
-              <a:buNone/>
-            </a:pPr>
-            <a:r>
-              <a:rPr b="1" i="0" lang="en-GB" sz="1427" u="none" cap="none" strike="noStrike">
-                <a:solidFill>
-                  <a:srgbClr val="272525"/>
-                </a:solidFill>
-                <a:latin typeface="Inter"/>
-                <a:ea typeface="Inter"/>
-                <a:cs typeface="Inter"/>
-                <a:sym typeface="Inter"/>
-              </a:rPr>
-              <a:t>Calculate Score</a:t>
-            </a:r>
-            <a:endParaRPr b="0" i="0" sz="1427" u="none" cap="none" strike="noStrike"/>
           </a:p>
         </p:txBody>
       </p:sp>
@@ -19459,8 +19429,8 @@
         </p:nvSpPr>
         <p:spPr>
           <a:xfrm>
-            <a:off x="388113" y="2573693"/>
-            <a:ext cx="3449700" cy="183300"/>
+            <a:off x="2002966" y="2294901"/>
+            <a:ext cx="1834800" cy="229200"/>
           </a:xfrm>
           <a:prstGeom prst="rect">
             <a:avLst/>
@@ -19478,6 +19448,64 @@
           <a:p>
             <a:pPr indent="0" lvl="0" marL="0" marR="0" rtl="0" algn="r">
               <a:lnSpc>
+                <a:spcPct val="125925"/>
+              </a:lnSpc>
+              <a:spcBef>
+                <a:spcPts val="0"/>
+              </a:spcBef>
+              <a:spcAft>
+                <a:spcPts val="0"/>
+              </a:spcAft>
+              <a:buClr>
+                <a:srgbClr val="272525"/>
+              </a:buClr>
+              <a:buSzPts val="1427"/>
+              <a:buFont typeface="Inter"/>
+              <a:buNone/>
+            </a:pPr>
+            <a:r>
+              <a:rPr b="1" i="0" lang="en-GB" sz="1427" u="none" cap="none" strike="noStrike">
+                <a:solidFill>
+                  <a:srgbClr val="272525"/>
+                </a:solidFill>
+                <a:latin typeface="Inter"/>
+                <a:ea typeface="Inter"/>
+                <a:cs typeface="Inter"/>
+                <a:sym typeface="Inter"/>
+              </a:rPr>
+              <a:t>Calculate Score</a:t>
+            </a:r>
+            <a:endParaRPr b="0" i="0" sz="1427" u="none" cap="none" strike="noStrike"/>
+          </a:p>
+        </p:txBody>
+      </p:sp>
+      <p:sp>
+        <p:nvSpPr>
+          <p:cNvPr id="210" name="Google Shape;210;p31"/>
+          <p:cNvSpPr/>
+          <p:nvPr/>
+        </p:nvSpPr>
+        <p:spPr>
+          <a:xfrm>
+            <a:off x="388113" y="2573693"/>
+            <a:ext cx="3449700" cy="183300"/>
+          </a:xfrm>
+          <a:prstGeom prst="rect">
+            <a:avLst/>
+          </a:prstGeom>
+          <a:noFill/>
+          <a:ln>
+            <a:noFill/>
+          </a:ln>
+        </p:spPr>
+        <p:txBody>
+          <a:bodyPr anchorCtr="0" anchor="t" bIns="0" lIns="0" spcFirstLastPara="1" rIns="0" wrap="square" tIns="0">
+            <a:noAutofit/>
+          </a:bodyPr>
+          <a:lstStyle/>
+          <a:p>
+            <a:pPr indent="0" lvl="0" marL="0" marR="0" rtl="0" algn="r">
+              <a:lnSpc>
                 <a:spcPct val="128571"/>
               </a:lnSpc>
               <a:spcBef>
@@ -19511,7 +19539,7 @@
       </p:sp>
       <p:sp>
         <p:nvSpPr>
-          <p:cNvPr id="210" name="Google Shape;210;p31"/>
+          <p:cNvPr id="211" name="Google Shape;211;p31"/>
           <p:cNvSpPr/>
           <p:nvPr/>
         </p:nvSpPr>
@@ -19556,7 +19584,7 @@
       </p:sp>
       <p:sp>
         <p:nvSpPr>
-          <p:cNvPr id="211" name="Google Shape;211;p31"/>
+          <p:cNvPr id="212" name="Google Shape;212;p31"/>
           <p:cNvSpPr/>
           <p:nvPr/>
         </p:nvSpPr>
@@ -19607,7 +19635,7 @@
       </p:sp>
       <p:sp>
         <p:nvSpPr>
-          <p:cNvPr id="212" name="Google Shape;212;p31"/>
+          <p:cNvPr id="213" name="Google Shape;213;p31"/>
           <p:cNvSpPr/>
           <p:nvPr/>
         </p:nvSpPr>
@@ -19660,64 +19688,6 @@
               <a:t>4</a:t>
             </a:r>
             <a:endParaRPr b="0" i="0" sz="1691" u="none" cap="none" strike="noStrike"/>
-          </a:p>
-        </p:txBody>
-      </p:sp>
-      <p:sp>
-        <p:nvSpPr>
-          <p:cNvPr id="213" name="Google Shape;213;p31"/>
-          <p:cNvSpPr/>
-          <p:nvPr/>
-        </p:nvSpPr>
-        <p:spPr>
-          <a:xfrm>
-            <a:off x="5306178" y="2989930"/>
-            <a:ext cx="1834800" cy="229200"/>
-          </a:xfrm>
-          <a:prstGeom prst="rect">
-            <a:avLst/>
-          </a:prstGeom>
-          <a:noFill/>
-          <a:ln>
-            <a:noFill/>
-          </a:ln>
-        </p:spPr>
-        <p:txBody>
-          <a:bodyPr anchorCtr="0" anchor="t" bIns="0" lIns="0" spcFirstLastPara="1" rIns="0" wrap="square" tIns="0">
-            <a:noAutofit/>
-          </a:bodyPr>
-          <a:lstStyle/>
-          <a:p>
-            <a:pPr indent="0" lvl="0" marL="0" marR="0" rtl="0" algn="l">
-              <a:lnSpc>
-                <a:spcPct val="125925"/>
-              </a:lnSpc>
-              <a:spcBef>
-                <a:spcPts val="0"/>
-              </a:spcBef>
-              <a:spcAft>
-                <a:spcPts val="0"/>
-              </a:spcAft>
-              <a:buClr>
-                <a:srgbClr val="272525"/>
-              </a:buClr>
-              <a:buSzPts val="1427"/>
-              <a:buFont typeface="Inter"/>
-              <a:buNone/>
-            </a:pPr>
-            <a:r>
-              <a:rPr b="1" i="0" lang="en-GB" sz="1427" u="none" cap="none" strike="noStrike">
-                <a:solidFill>
-                  <a:srgbClr val="272525"/>
-                </a:solidFill>
-                <a:latin typeface="Inter"/>
-                <a:ea typeface="Inter"/>
-                <a:cs typeface="Inter"/>
-                <a:sym typeface="Inter"/>
-              </a:rPr>
-              <a:t>Apply Quality Bonus</a:t>
-            </a:r>
-            <a:endParaRPr b="0" i="0" sz="1427" u="none" cap="none" strike="noStrike"/>
           </a:p>
         </p:txBody>
       </p:sp>
@@ -19729,8 +19699,8 @@
         </p:nvSpPr>
         <p:spPr>
           <a:xfrm>
-            <a:off x="5306178" y="3268722"/>
-            <a:ext cx="3449700" cy="183300"/>
+            <a:off x="5306178" y="2989930"/>
+            <a:ext cx="1834800" cy="229200"/>
           </a:xfrm>
           <a:prstGeom prst="rect">
             <a:avLst/>
@@ -19748,6 +19718,64 @@
           <a:p>
             <a:pPr indent="0" lvl="0" marL="0" marR="0" rtl="0" algn="l">
               <a:lnSpc>
+                <a:spcPct val="125925"/>
+              </a:lnSpc>
+              <a:spcBef>
+                <a:spcPts val="0"/>
+              </a:spcBef>
+              <a:spcAft>
+                <a:spcPts val="0"/>
+              </a:spcAft>
+              <a:buClr>
+                <a:srgbClr val="272525"/>
+              </a:buClr>
+              <a:buSzPts val="1427"/>
+              <a:buFont typeface="Inter"/>
+              <a:buNone/>
+            </a:pPr>
+            <a:r>
+              <a:rPr b="1" i="0" lang="en-GB" sz="1427" u="none" cap="none" strike="noStrike">
+                <a:solidFill>
+                  <a:srgbClr val="272525"/>
+                </a:solidFill>
+                <a:latin typeface="Inter"/>
+                <a:ea typeface="Inter"/>
+                <a:cs typeface="Inter"/>
+                <a:sym typeface="Inter"/>
+              </a:rPr>
+              <a:t>Apply Quality Bonus</a:t>
+            </a:r>
+            <a:endParaRPr b="0" i="0" sz="1427" u="none" cap="none" strike="noStrike"/>
+          </a:p>
+        </p:txBody>
+      </p:sp>
+      <p:sp>
+        <p:nvSpPr>
+          <p:cNvPr id="215" name="Google Shape;215;p31"/>
+          <p:cNvSpPr/>
+          <p:nvPr/>
+        </p:nvSpPr>
+        <p:spPr>
+          <a:xfrm>
+            <a:off x="5306178" y="3268722"/>
+            <a:ext cx="3449700" cy="183300"/>
+          </a:xfrm>
+          <a:prstGeom prst="rect">
+            <a:avLst/>
+          </a:prstGeom>
+          <a:noFill/>
+          <a:ln>
+            <a:noFill/>
+          </a:ln>
+        </p:spPr>
+        <p:txBody>
+          <a:bodyPr anchorCtr="0" anchor="t" bIns="0" lIns="0" spcFirstLastPara="1" rIns="0" wrap="square" tIns="0">
+            <a:noAutofit/>
+          </a:bodyPr>
+          <a:lstStyle/>
+          <a:p>
+            <a:pPr indent="0" lvl="0" marL="0" marR="0" rtl="0" algn="l">
+              <a:lnSpc>
                 <a:spcPct val="128571"/>
               </a:lnSpc>
               <a:spcBef>
@@ -19781,7 +19809,7 @@
       </p:sp>
       <p:sp>
         <p:nvSpPr>
-          <p:cNvPr id="215" name="Google Shape;215;p31"/>
+          <p:cNvPr id="216" name="Google Shape;216;p31"/>
           <p:cNvSpPr/>
           <p:nvPr/>
         </p:nvSpPr>
@@ -19826,7 +19854,7 @@
       </p:sp>
       <p:sp>
         <p:nvSpPr>
-          <p:cNvPr id="216" name="Google Shape;216;p31"/>
+          <p:cNvPr id="217" name="Google Shape;217;p31"/>
           <p:cNvSpPr/>
           <p:nvPr/>
         </p:nvSpPr>
@@ -19877,7 +19905,7 @@
       </p:sp>
       <p:sp>
         <p:nvSpPr>
-          <p:cNvPr id="217" name="Google Shape;217;p31"/>
+          <p:cNvPr id="218" name="Google Shape;218;p31"/>
           <p:cNvSpPr/>
           <p:nvPr/>
         </p:nvSpPr>
@@ -19930,64 +19958,6 @@
               <a:t>5</a:t>
             </a:r>
             <a:endParaRPr b="0" i="0" sz="1691" u="none" cap="none" strike="noStrike"/>
-          </a:p>
-        </p:txBody>
-      </p:sp>
-      <p:sp>
-        <p:nvSpPr>
-          <p:cNvPr id="218" name="Google Shape;218;p31"/>
-          <p:cNvSpPr/>
-          <p:nvPr/>
-        </p:nvSpPr>
-        <p:spPr>
-          <a:xfrm>
-            <a:off x="2002966" y="3684960"/>
-            <a:ext cx="1834800" cy="229200"/>
-          </a:xfrm>
-          <a:prstGeom prst="rect">
-            <a:avLst/>
-          </a:prstGeom>
-          <a:noFill/>
-          <a:ln>
-            <a:noFill/>
-          </a:ln>
-        </p:spPr>
-        <p:txBody>
-          <a:bodyPr anchorCtr="0" anchor="t" bIns="0" lIns="0" spcFirstLastPara="1" rIns="0" wrap="square" tIns="0">
-            <a:noAutofit/>
-          </a:bodyPr>
-          <a:lstStyle/>
-          <a:p>
-            <a:pPr indent="0" lvl="0" marL="0" marR="0" rtl="0" algn="r">
-              <a:lnSpc>
-                <a:spcPct val="125925"/>
-              </a:lnSpc>
-              <a:spcBef>
-                <a:spcPts val="0"/>
-              </a:spcBef>
-              <a:spcAft>
-                <a:spcPts val="0"/>
-              </a:spcAft>
-              <a:buClr>
-                <a:srgbClr val="272525"/>
-              </a:buClr>
-              <a:buSzPts val="1427"/>
-              <a:buFont typeface="Inter"/>
-              <a:buNone/>
-            </a:pPr>
-            <a:r>
-              <a:rPr b="1" i="0" lang="en-GB" sz="1427" u="none" cap="none" strike="noStrike">
-                <a:solidFill>
-                  <a:srgbClr val="272525"/>
-                </a:solidFill>
-                <a:latin typeface="Inter"/>
-                <a:ea typeface="Inter"/>
-                <a:cs typeface="Inter"/>
-                <a:sym typeface="Inter"/>
-              </a:rPr>
-              <a:t>Boost by Images</a:t>
-            </a:r>
-            <a:endParaRPr b="0" i="0" sz="1427" u="none" cap="none" strike="noStrike"/>
           </a:p>
         </p:txBody>
       </p:sp>
@@ -19999,8 +19969,8 @@
         </p:nvSpPr>
         <p:spPr>
           <a:xfrm>
-            <a:off x="388113" y="3963753"/>
-            <a:ext cx="3449700" cy="183300"/>
+            <a:off x="2002966" y="3684960"/>
+            <a:ext cx="1834800" cy="229200"/>
           </a:xfrm>
           <a:prstGeom prst="rect">
             <a:avLst/>
@@ -20018,6 +19988,64 @@
           <a:p>
             <a:pPr indent="0" lvl="0" marL="0" marR="0" rtl="0" algn="r">
               <a:lnSpc>
+                <a:spcPct val="125925"/>
+              </a:lnSpc>
+              <a:spcBef>
+                <a:spcPts val="0"/>
+              </a:spcBef>
+              <a:spcAft>
+                <a:spcPts val="0"/>
+              </a:spcAft>
+              <a:buClr>
+                <a:srgbClr val="272525"/>
+              </a:buClr>
+              <a:buSzPts val="1427"/>
+              <a:buFont typeface="Inter"/>
+              <a:buNone/>
+            </a:pPr>
+            <a:r>
+              <a:rPr b="1" i="0" lang="en-GB" sz="1427" u="none" cap="none" strike="noStrike">
+                <a:solidFill>
+                  <a:srgbClr val="272525"/>
+                </a:solidFill>
+                <a:latin typeface="Inter"/>
+                <a:ea typeface="Inter"/>
+                <a:cs typeface="Inter"/>
+                <a:sym typeface="Inter"/>
+              </a:rPr>
+              <a:t>Boost by Images</a:t>
+            </a:r>
+            <a:endParaRPr b="0" i="0" sz="1427" u="none" cap="none" strike="noStrike"/>
+          </a:p>
+        </p:txBody>
+      </p:sp>
+      <p:sp>
+        <p:nvSpPr>
+          <p:cNvPr id="220" name="Google Shape;220;p31"/>
+          <p:cNvSpPr/>
+          <p:nvPr/>
+        </p:nvSpPr>
+        <p:spPr>
+          <a:xfrm>
+            <a:off x="388113" y="3963753"/>
+            <a:ext cx="3449700" cy="183300"/>
+          </a:xfrm>
+          <a:prstGeom prst="rect">
+            <a:avLst/>
+          </a:prstGeom>
+          <a:noFill/>
+          <a:ln>
+            <a:noFill/>
+          </a:ln>
+        </p:spPr>
+        <p:txBody>
+          <a:bodyPr anchorCtr="0" anchor="t" bIns="0" lIns="0" spcFirstLastPara="1" rIns="0" wrap="square" tIns="0">
+            <a:noAutofit/>
+          </a:bodyPr>
+          <a:lstStyle/>
+          <a:p>
+            <a:pPr indent="0" lvl="0" marL="0" marR="0" rtl="0" algn="r">
+              <a:lnSpc>
                 <a:spcPct val="128571"/>
               </a:lnSpc>
               <a:spcBef>
@@ -20051,7 +20079,7 @@
       </p:sp>
       <p:sp>
         <p:nvSpPr>
-          <p:cNvPr id="220" name="Google Shape;220;p31"/>
+          <p:cNvPr id="221" name="Google Shape;221;p31"/>
           <p:cNvSpPr/>
           <p:nvPr/>
         </p:nvSpPr>
@@ -20096,7 +20124,7 @@
       </p:sp>
       <p:sp>
         <p:nvSpPr>
-          <p:cNvPr id="221" name="Google Shape;221;p31"/>
+          <p:cNvPr id="222" name="Google Shape;222;p31"/>
           <p:cNvSpPr/>
           <p:nvPr/>
         </p:nvSpPr>
@@ -20147,7 +20175,7 @@
       </p:sp>
       <p:sp>
         <p:nvSpPr>
-          <p:cNvPr id="222" name="Google Shape;222;p31"/>
+          <p:cNvPr id="223" name="Google Shape;223;p31"/>
           <p:cNvSpPr/>
           <p:nvPr/>
         </p:nvSpPr>
@@ -20200,64 +20228,6 @@
               <a:t>6</a:t>
             </a:r>
             <a:endParaRPr b="0" i="0" sz="1691" u="none" cap="none" strike="noStrike"/>
-          </a:p>
-        </p:txBody>
-      </p:sp>
-      <p:sp>
-        <p:nvSpPr>
-          <p:cNvPr id="223" name="Google Shape;223;p31"/>
-          <p:cNvSpPr/>
-          <p:nvPr/>
-        </p:nvSpPr>
-        <p:spPr>
-          <a:xfrm>
-            <a:off x="5306178" y="4379990"/>
-            <a:ext cx="1834800" cy="229200"/>
-          </a:xfrm>
-          <a:prstGeom prst="rect">
-            <a:avLst/>
-          </a:prstGeom>
-          <a:noFill/>
-          <a:ln>
-            <a:noFill/>
-          </a:ln>
-        </p:spPr>
-        <p:txBody>
-          <a:bodyPr anchorCtr="0" anchor="t" bIns="0" lIns="0" spcFirstLastPara="1" rIns="0" wrap="square" tIns="0">
-            <a:noAutofit/>
-          </a:bodyPr>
-          <a:lstStyle/>
-          <a:p>
-            <a:pPr indent="0" lvl="0" marL="0" marR="0" rtl="0" algn="l">
-              <a:lnSpc>
-                <a:spcPct val="125925"/>
-              </a:lnSpc>
-              <a:spcBef>
-                <a:spcPts val="0"/>
-              </a:spcBef>
-              <a:spcAft>
-                <a:spcPts val="0"/>
-              </a:spcAft>
-              <a:buClr>
-                <a:srgbClr val="272525"/>
-              </a:buClr>
-              <a:buSzPts val="1427"/>
-              <a:buFont typeface="Inter"/>
-              <a:buNone/>
-            </a:pPr>
-            <a:r>
-              <a:rPr b="1" i="0" lang="en-GB" sz="1427" u="none" cap="none" strike="noStrike">
-                <a:solidFill>
-                  <a:srgbClr val="272525"/>
-                </a:solidFill>
-                <a:latin typeface="Inter"/>
-                <a:ea typeface="Inter"/>
-                <a:cs typeface="Inter"/>
-                <a:sym typeface="Inter"/>
-              </a:rPr>
-              <a:t>Boost by History</a:t>
-            </a:r>
-            <a:endParaRPr b="0" i="0" sz="1427" u="none" cap="none" strike="noStrike"/>
           </a:p>
         </p:txBody>
       </p:sp>
@@ -20269,8 +20239,8 @@
         </p:nvSpPr>
         <p:spPr>
           <a:xfrm>
-            <a:off x="5306178" y="4658782"/>
-            <a:ext cx="3449700" cy="183300"/>
+            <a:off x="5306178" y="4379990"/>
+            <a:ext cx="1834800" cy="229200"/>
           </a:xfrm>
           <a:prstGeom prst="rect">
             <a:avLst/>
@@ -20288,6 +20258,64 @@
           <a:p>
             <a:pPr indent="0" lvl="0" marL="0" marR="0" rtl="0" algn="l">
               <a:lnSpc>
+                <a:spcPct val="125925"/>
+              </a:lnSpc>
+              <a:spcBef>
+                <a:spcPts val="0"/>
+              </a:spcBef>
+              <a:spcAft>
+                <a:spcPts val="0"/>
+              </a:spcAft>
+              <a:buClr>
+                <a:srgbClr val="272525"/>
+              </a:buClr>
+              <a:buSzPts val="1427"/>
+              <a:buFont typeface="Inter"/>
+              <a:buNone/>
+            </a:pPr>
+            <a:r>
+              <a:rPr b="1" i="0" lang="en-GB" sz="1427" u="none" cap="none" strike="noStrike">
+                <a:solidFill>
+                  <a:srgbClr val="272525"/>
+                </a:solidFill>
+                <a:latin typeface="Inter"/>
+                <a:ea typeface="Inter"/>
+                <a:cs typeface="Inter"/>
+                <a:sym typeface="Inter"/>
+              </a:rPr>
+              <a:t>Boost by History</a:t>
+            </a:r>
+            <a:endParaRPr b="0" i="0" sz="1427" u="none" cap="none" strike="noStrike"/>
+          </a:p>
+        </p:txBody>
+      </p:sp>
+      <p:sp>
+        <p:nvSpPr>
+          <p:cNvPr id="225" name="Google Shape;225;p31"/>
+          <p:cNvSpPr/>
+          <p:nvPr/>
+        </p:nvSpPr>
+        <p:spPr>
+          <a:xfrm>
+            <a:off x="5306178" y="4658782"/>
+            <a:ext cx="3449700" cy="183300"/>
+          </a:xfrm>
+          <a:prstGeom prst="rect">
+            <a:avLst/>
+          </a:prstGeom>
+          <a:noFill/>
+          <a:ln>
+            <a:noFill/>
+          </a:ln>
+        </p:spPr>
+        <p:txBody>
+          <a:bodyPr anchorCtr="0" anchor="t" bIns="0" lIns="0" spcFirstLastPara="1" rIns="0" wrap="square" tIns="0">
+            <a:noAutofit/>
+          </a:bodyPr>
+          <a:lstStyle/>
+          <a:p>
+            <a:pPr indent="0" lvl="0" marL="0" marR="0" rtl="0" algn="l">
+              <a:lnSpc>
                 <a:spcPct val="128571"/>
               </a:lnSpc>
               <a:spcBef>
@@ -20321,7 +20349,7 @@
       </p:sp>
       <p:sp>
         <p:nvSpPr>
-          <p:cNvPr id="225" name="Google Shape;225;p31"/>
+          <p:cNvPr id="226" name="Google Shape;226;p31"/>
           <p:cNvSpPr txBox="1"/>
           <p:nvPr>
             <p:ph type="title"/>
@@ -20379,7 +20407,7 @@
     </p:bg>
     <p:spTree>
       <p:nvGrpSpPr>
-        <p:cNvPr id="229" name="Shape 229"/>
+        <p:cNvPr id="230" name="Shape 230"/>
         <p:cNvGrpSpPr/>
         <p:nvPr/>
       </p:nvGrpSpPr>
@@ -20393,7 +20421,7 @@
       </p:grpSpPr>
       <p:sp>
         <p:nvSpPr>
-          <p:cNvPr id="230" name="Google Shape;230;p32"/>
+          <p:cNvPr id="231" name="Google Shape;231;p32"/>
           <p:cNvSpPr txBox="1"/>
           <p:nvPr/>
         </p:nvSpPr>
@@ -20448,7 +20476,7 @@
       </p:sp>
       <p:sp>
         <p:nvSpPr>
-          <p:cNvPr id="231" name="Google Shape;231;p32"/>
+          <p:cNvPr id="232" name="Google Shape;232;p32"/>
           <p:cNvSpPr txBox="1"/>
           <p:nvPr/>
         </p:nvSpPr>
@@ -20501,7 +20529,7 @@
       </p:sp>
       <p:sp>
         <p:nvSpPr>
-          <p:cNvPr id="232" name="Google Shape;232;p32"/>
+          <p:cNvPr id="233" name="Google Shape;233;p32"/>
           <p:cNvSpPr/>
           <p:nvPr/>
         </p:nvSpPr>
@@ -20552,7 +20580,7 @@
       </p:sp>
       <p:sp>
         <p:nvSpPr>
-          <p:cNvPr id="233" name="Google Shape;233;p32"/>
+          <p:cNvPr id="234" name="Google Shape;234;p32"/>
           <p:cNvSpPr txBox="1"/>
           <p:nvPr/>
         </p:nvSpPr>
@@ -20659,7 +20687,7 @@
       </p:sp>
       <p:sp>
         <p:nvSpPr>
-          <p:cNvPr id="234" name="Google Shape;234;p32"/>
+          <p:cNvPr id="235" name="Google Shape;235;p32"/>
           <p:cNvSpPr/>
           <p:nvPr/>
         </p:nvSpPr>
@@ -20702,7 +20730,7 @@
       </p:sp>
       <p:sp>
         <p:nvSpPr>
-          <p:cNvPr id="235" name="Google Shape;235;p32"/>
+          <p:cNvPr id="236" name="Google Shape;236;p32"/>
           <p:cNvSpPr/>
           <p:nvPr/>
         </p:nvSpPr>
@@ -20747,7 +20775,7 @@
       </p:sp>
       <p:sp>
         <p:nvSpPr>
-          <p:cNvPr id="236" name="Google Shape;236;p32"/>
+          <p:cNvPr id="237" name="Google Shape;237;p32"/>
           <p:cNvSpPr txBox="1"/>
           <p:nvPr/>
         </p:nvSpPr>
@@ -20800,7 +20828,7 @@
       </p:sp>
       <p:sp>
         <p:nvSpPr>
-          <p:cNvPr id="237" name="Google Shape;237;p32"/>
+          <p:cNvPr id="238" name="Google Shape;238;p32"/>
           <p:cNvSpPr txBox="1"/>
           <p:nvPr/>
         </p:nvSpPr>
@@ -20853,7 +20881,7 @@
       </p:sp>
       <p:sp>
         <p:nvSpPr>
-          <p:cNvPr id="238" name="Google Shape;238;p32"/>
+          <p:cNvPr id="239" name="Google Shape;239;p32"/>
           <p:cNvSpPr/>
           <p:nvPr/>
         </p:nvSpPr>
@@ -20896,7 +20924,7 @@
       </p:sp>
       <p:sp>
         <p:nvSpPr>
-          <p:cNvPr id="239" name="Google Shape;239;p32"/>
+          <p:cNvPr id="240" name="Google Shape;240;p32"/>
           <p:cNvSpPr/>
           <p:nvPr/>
         </p:nvSpPr>
@@ -20947,7 +20975,7 @@
       </p:sp>
       <p:sp>
         <p:nvSpPr>
-          <p:cNvPr id="240" name="Google Shape;240;p32"/>
+          <p:cNvPr id="241" name="Google Shape;241;p32"/>
           <p:cNvSpPr txBox="1"/>
           <p:nvPr/>
         </p:nvSpPr>
@@ -21105,7 +21133,7 @@
       </p:sp>
       <p:sp>
         <p:nvSpPr>
-          <p:cNvPr id="241" name="Google Shape;241;p32"/>
+          <p:cNvPr id="242" name="Google Shape;242;p32"/>
           <p:cNvSpPr/>
           <p:nvPr/>
         </p:nvSpPr>
@@ -21156,7 +21184,7 @@
       </p:sp>
       <p:sp>
         <p:nvSpPr>
-          <p:cNvPr id="242" name="Google Shape;242;p32"/>
+          <p:cNvPr id="243" name="Google Shape;243;p32"/>
           <p:cNvSpPr txBox="1"/>
           <p:nvPr/>
         </p:nvSpPr>
@@ -21314,7 +21342,7 @@
       </p:sp>
       <p:sp>
         <p:nvSpPr>
-          <p:cNvPr id="243" name="Google Shape;243;p32"/>
+          <p:cNvPr id="244" name="Google Shape;244;p32"/>
           <p:cNvSpPr/>
           <p:nvPr/>
         </p:nvSpPr>
@@ -21365,7 +21393,7 @@
       </p:sp>
       <p:sp>
         <p:nvSpPr>
-          <p:cNvPr id="244" name="Google Shape;244;p32"/>
+          <p:cNvPr id="245" name="Google Shape;245;p32"/>
           <p:cNvSpPr txBox="1"/>
           <p:nvPr/>
         </p:nvSpPr>
@@ -21523,7 +21551,7 @@
       </p:sp>
       <p:sp>
         <p:nvSpPr>
-          <p:cNvPr id="245" name="Google Shape;245;p32"/>
+          <p:cNvPr id="246" name="Google Shape;246;p32"/>
           <p:cNvSpPr/>
           <p:nvPr/>
         </p:nvSpPr>
@@ -21574,7 +21602,7 @@
       </p:sp>
       <p:sp>
         <p:nvSpPr>
-          <p:cNvPr id="246" name="Google Shape;246;p32"/>
+          <p:cNvPr id="247" name="Google Shape;247;p32"/>
           <p:cNvSpPr txBox="1"/>
           <p:nvPr/>
         </p:nvSpPr>
@@ -21732,7 +21760,7 @@
       </p:sp>
       <p:sp>
         <p:nvSpPr>
-          <p:cNvPr id="247" name="Google Shape;247;p32"/>
+          <p:cNvPr id="248" name="Google Shape;248;p32"/>
           <p:cNvSpPr/>
           <p:nvPr/>
         </p:nvSpPr>
@@ -21783,7 +21811,7 @@
       </p:sp>
       <p:sp>
         <p:nvSpPr>
-          <p:cNvPr id="248" name="Google Shape;248;p32"/>
+          <p:cNvPr id="249" name="Google Shape;249;p32"/>
           <p:cNvSpPr txBox="1"/>
           <p:nvPr/>
         </p:nvSpPr>
@@ -21941,7 +21969,7 @@
       </p:sp>
       <p:sp>
         <p:nvSpPr>
-          <p:cNvPr id="249" name="Google Shape;249;p32"/>
+          <p:cNvPr id="250" name="Google Shape;250;p32"/>
           <p:cNvSpPr/>
           <p:nvPr/>
         </p:nvSpPr>
@@ -21986,7 +22014,7 @@
       </p:sp>
       <p:sp>
         <p:nvSpPr>
-          <p:cNvPr id="250" name="Google Shape;250;p32"/>
+          <p:cNvPr id="251" name="Google Shape;251;p32"/>
           <p:cNvSpPr txBox="1"/>
           <p:nvPr/>
         </p:nvSpPr>
@@ -22039,7 +22067,7 @@
       </p:sp>
       <p:sp>
         <p:nvSpPr>
-          <p:cNvPr id="251" name="Google Shape;251;p32"/>
+          <p:cNvPr id="252" name="Google Shape;252;p32"/>
           <p:cNvSpPr txBox="1"/>
           <p:nvPr/>
         </p:nvSpPr>
@@ -22092,7 +22120,7 @@
       </p:sp>
       <p:sp>
         <p:nvSpPr>
-          <p:cNvPr id="252" name="Google Shape;252;p32"/>
+          <p:cNvPr id="253" name="Google Shape;253;p32"/>
           <p:cNvSpPr/>
           <p:nvPr/>
         </p:nvSpPr>
@@ -22135,7 +22163,7 @@
       </p:sp>
       <p:sp>
         <p:nvSpPr>
-          <p:cNvPr id="253" name="Google Shape;253;p32"/>
+          <p:cNvPr id="254" name="Google Shape;254;p32"/>
           <p:cNvSpPr/>
           <p:nvPr/>
         </p:nvSpPr>
@@ -22186,7 +22214,7 @@
       </p:sp>
       <p:sp>
         <p:nvSpPr>
-          <p:cNvPr id="254" name="Google Shape;254;p32"/>
+          <p:cNvPr id="255" name="Google Shape;255;p32"/>
           <p:cNvSpPr txBox="1"/>
           <p:nvPr/>
         </p:nvSpPr>
@@ -22344,7 +22372,7 @@
       </p:sp>
       <p:sp>
         <p:nvSpPr>
-          <p:cNvPr id="255" name="Google Shape;255;p32"/>
+          <p:cNvPr id="256" name="Google Shape;256;p32"/>
           <p:cNvSpPr/>
           <p:nvPr/>
         </p:nvSpPr>
@@ -22395,7 +22423,7 @@
       </p:sp>
       <p:sp>
         <p:nvSpPr>
-          <p:cNvPr id="256" name="Google Shape;256;p32"/>
+          <p:cNvPr id="257" name="Google Shape;257;p32"/>
           <p:cNvSpPr txBox="1"/>
           <p:nvPr/>
         </p:nvSpPr>
@@ -22553,7 +22581,7 @@
       </p:sp>
       <p:sp>
         <p:nvSpPr>
-          <p:cNvPr id="257" name="Google Shape;257;p32"/>
+          <p:cNvPr id="258" name="Google Shape;258;p32"/>
           <p:cNvSpPr/>
           <p:nvPr/>
         </p:nvSpPr>
@@ -22604,7 +22632,7 @@
       </p:sp>
       <p:sp>
         <p:nvSpPr>
-          <p:cNvPr id="258" name="Google Shape;258;p32"/>
+          <p:cNvPr id="259" name="Google Shape;259;p32"/>
           <p:cNvSpPr txBox="1"/>
           <p:nvPr/>
         </p:nvSpPr>
@@ -22762,7 +22790,7 @@
       </p:sp>
       <p:sp>
         <p:nvSpPr>
-          <p:cNvPr id="259" name="Google Shape;259;p32"/>
+          <p:cNvPr id="260" name="Google Shape;260;p32"/>
           <p:cNvSpPr/>
           <p:nvPr/>
         </p:nvSpPr>
@@ -22813,7 +22841,7 @@
       </p:sp>
       <p:sp>
         <p:nvSpPr>
-          <p:cNvPr id="260" name="Google Shape;260;p32"/>
+          <p:cNvPr id="261" name="Google Shape;261;p32"/>
           <p:cNvSpPr txBox="1"/>
           <p:nvPr/>
         </p:nvSpPr>
@@ -22971,7 +22999,7 @@
       </p:sp>
       <p:sp>
         <p:nvSpPr>
-          <p:cNvPr id="261" name="Google Shape;261;p32"/>
+          <p:cNvPr id="262" name="Google Shape;262;p32"/>
           <p:cNvSpPr/>
           <p:nvPr/>
         </p:nvSpPr>
@@ -23022,7 +23050,7 @@
       </p:sp>
       <p:sp>
         <p:nvSpPr>
-          <p:cNvPr id="262" name="Google Shape;262;p32"/>
+          <p:cNvPr id="263" name="Google Shape;263;p32"/>
           <p:cNvSpPr txBox="1"/>
           <p:nvPr/>
         </p:nvSpPr>
@@ -23180,7 +23208,7 @@
       </p:sp>
       <p:sp>
         <p:nvSpPr>
-          <p:cNvPr id="263" name="Google Shape;263;p32"/>
+          <p:cNvPr id="264" name="Google Shape;264;p32"/>
           <p:cNvSpPr/>
           <p:nvPr/>
         </p:nvSpPr>
@@ -23231,7 +23259,7 @@
       </p:sp>
       <p:sp>
         <p:nvSpPr>
-          <p:cNvPr id="264" name="Google Shape;264;p32"/>
+          <p:cNvPr id="265" name="Google Shape;265;p32"/>
           <p:cNvSpPr txBox="1"/>
           <p:nvPr/>
         </p:nvSpPr>
@@ -23539,7 +23567,7 @@
       </p:sp>
       <p:sp>
         <p:nvSpPr>
-          <p:cNvPr id="265" name="Google Shape;265;p32"/>
+          <p:cNvPr id="266" name="Google Shape;266;p32"/>
           <p:cNvSpPr/>
           <p:nvPr/>
         </p:nvSpPr>
@@ -23590,7 +23618,7 @@
       </p:sp>
       <p:sp>
         <p:nvSpPr>
-          <p:cNvPr id="266" name="Google Shape;266;p32"/>
+          <p:cNvPr id="267" name="Google Shape;267;p32"/>
           <p:cNvSpPr txBox="1"/>
           <p:nvPr/>
         </p:nvSpPr>
@@ -23888,7 +23916,7 @@
   <p:cSld>
     <p:spTree>
       <p:nvGrpSpPr>
-        <p:cNvPr id="270" name="Shape 270"/>
+        <p:cNvPr id="271" name="Shape 271"/>
         <p:cNvGrpSpPr/>
         <p:nvPr/>
       </p:nvGrpSpPr>
@@ -23902,7 +23930,7 @@
       </p:grpSpPr>
       <p:sp>
         <p:nvSpPr>
-          <p:cNvPr id="271" name="Google Shape;271;p33"/>
+          <p:cNvPr id="272" name="Google Shape;272;p33"/>
           <p:cNvSpPr txBox="1"/>
           <p:nvPr>
             <p:ph type="title"/>
@@ -23942,7 +23970,7 @@
       </p:sp>
       <p:sp>
         <p:nvSpPr>
-          <p:cNvPr id="272" name="Google Shape;272;p33"/>
+          <p:cNvPr id="273" name="Google Shape;273;p33"/>
           <p:cNvSpPr/>
           <p:nvPr/>
         </p:nvSpPr>
@@ -24000,7 +24028,7 @@
       </p:sp>
       <p:sp>
         <p:nvSpPr>
-          <p:cNvPr id="273" name="Google Shape;273;p33"/>
+          <p:cNvPr id="274" name="Google Shape;274;p33"/>
           <p:cNvSpPr/>
           <p:nvPr/>
         </p:nvSpPr>
@@ -24045,7 +24073,7 @@
       </p:sp>
       <p:sp>
         <p:nvSpPr>
-          <p:cNvPr id="274" name="Google Shape;274;p33"/>
+          <p:cNvPr id="275" name="Google Shape;275;p33"/>
           <p:cNvSpPr/>
           <p:nvPr/>
         </p:nvSpPr>
@@ -24090,7 +24118,7 @@
       </p:sp>
       <p:pic>
         <p:nvPicPr>
-          <p:cNvPr descr="preencoded.png" id="275" name="Google Shape;275;p33"/>
+          <p:cNvPr descr="preencoded.png" id="276" name="Google Shape;276;p33"/>
           <p:cNvPicPr preferRelativeResize="0"/>
           <p:nvPr/>
         </p:nvPicPr>
@@ -24117,7 +24145,7 @@
       </p:pic>
       <p:sp>
         <p:nvSpPr>
-          <p:cNvPr id="276" name="Google Shape;276;p33"/>
+          <p:cNvPr id="277" name="Google Shape;277;p33"/>
           <p:cNvSpPr/>
           <p:nvPr/>
         </p:nvSpPr>
@@ -24170,64 +24198,6 @@
               <a:t>COLD SEARCH</a:t>
             </a:r>
             <a:endParaRPr b="0" i="0" sz="1106" u="none" cap="none" strike="noStrike"/>
-          </a:p>
-        </p:txBody>
-      </p:sp>
-      <p:sp>
-        <p:nvSpPr>
-          <p:cNvPr id="277" name="Google Shape;277;p33"/>
-          <p:cNvSpPr/>
-          <p:nvPr/>
-        </p:nvSpPr>
-        <p:spPr>
-          <a:xfrm>
-            <a:off x="1738682" y="1998132"/>
-            <a:ext cx="2586000" cy="153600"/>
-          </a:xfrm>
-          <a:prstGeom prst="rect">
-            <a:avLst/>
-          </a:prstGeom>
-          <a:noFill/>
-          <a:ln>
-            <a:noFill/>
-          </a:ln>
-        </p:spPr>
-        <p:txBody>
-          <a:bodyPr anchorCtr="0" anchor="t" bIns="0" lIns="0" spcFirstLastPara="1" rIns="0" wrap="square" tIns="0">
-            <a:noAutofit/>
-          </a:bodyPr>
-          <a:lstStyle/>
-          <a:p>
-            <a:pPr indent="0" lvl="0" marL="0" marR="0" rtl="0" algn="l">
-              <a:lnSpc>
-                <a:spcPct val="138461"/>
-              </a:lnSpc>
-              <a:spcBef>
-                <a:spcPts val="0"/>
-              </a:spcBef>
-              <a:spcAft>
-                <a:spcPts val="0"/>
-              </a:spcAft>
-              <a:buClr>
-                <a:srgbClr val="000000"/>
-              </a:buClr>
-              <a:buSzPts val="872"/>
-              <a:buFont typeface="Inter"/>
-              <a:buNone/>
-            </a:pPr>
-            <a:r>
-              <a:rPr b="0" i="0" lang="en-GB" sz="872" u="none" cap="none" strike="noStrike">
-                <a:solidFill>
-                  <a:srgbClr val="000000"/>
-                </a:solidFill>
-                <a:latin typeface="Inter"/>
-                <a:ea typeface="Inter"/>
-                <a:cs typeface="Inter"/>
-                <a:sym typeface="Inter"/>
-              </a:rPr>
-              <a:t>No user context</a:t>
-            </a:r>
-            <a:endParaRPr b="0" i="0" sz="872" u="none" cap="none" strike="noStrike"/>
           </a:p>
         </p:txBody>
       </p:sp>
@@ -24239,8 +24209,8 @@
         </p:nvSpPr>
         <p:spPr>
           <a:xfrm>
-            <a:off x="1333341" y="2423915"/>
-            <a:ext cx="1503600" cy="375600"/>
+            <a:off x="1738682" y="1998132"/>
+            <a:ext cx="2586000" cy="153600"/>
           </a:xfrm>
           <a:prstGeom prst="rect">
             <a:avLst/>
@@ -24256,9 +24226,9 @@
           </a:bodyPr>
           <a:lstStyle/>
           <a:p>
-            <a:pPr indent="0" lvl="0" marL="0" marR="0" rtl="0" algn="ctr">
-              <a:lnSpc>
-                <a:spcPct val="100000"/>
+            <a:pPr indent="0" lvl="0" marL="0" marR="0" rtl="0" algn="l">
+              <a:lnSpc>
+                <a:spcPct val="138461"/>
               </a:lnSpc>
               <a:spcBef>
                 <a:spcPts val="0"/>
@@ -24267,25 +24237,25 @@
                 <a:spcPts val="0"/>
               </a:spcAft>
               <a:buClr>
-                <a:srgbClr val="272525"/>
+                <a:srgbClr val="000000"/>
               </a:buClr>
-              <a:buSzPts val="2950"/>
+              <a:buSzPts val="872"/>
               <a:buFont typeface="Inter"/>
               <a:buNone/>
             </a:pPr>
             <a:r>
-              <a:rPr b="1" i="0" lang="en-GB" sz="2950" u="none" cap="none" strike="noStrike">
-                <a:solidFill>
-                  <a:srgbClr val="272525"/>
+              <a:rPr b="0" i="0" lang="en-GB" sz="872" u="none" cap="none" strike="noStrike">
+                <a:solidFill>
+                  <a:srgbClr val="000000"/>
                 </a:solidFill>
                 <a:latin typeface="Inter"/>
                 <a:ea typeface="Inter"/>
                 <a:cs typeface="Inter"/>
                 <a:sym typeface="Inter"/>
               </a:rPr>
-              <a:t>2.20</a:t>
-            </a:r>
-            <a:endParaRPr b="0" i="0" sz="2950" u="none" cap="none" strike="noStrike"/>
+              <a:t>No user context</a:t>
+            </a:r>
+            <a:endParaRPr b="0" i="0" sz="872" u="none" cap="none" strike="noStrike"/>
           </a:p>
         </p:txBody>
       </p:sp>
@@ -24297,8 +24267,8 @@
         </p:nvSpPr>
         <p:spPr>
           <a:xfrm>
-            <a:off x="1373739" y="2915006"/>
-            <a:ext cx="1422600" cy="177900"/>
+            <a:off x="1333341" y="2423915"/>
+            <a:ext cx="1503600" cy="375600"/>
           </a:xfrm>
           <a:prstGeom prst="rect">
             <a:avLst/>
@@ -24316,7 +24286,7 @@
           <a:p>
             <a:pPr indent="0" lvl="0" marL="0" marR="0" rtl="0" algn="ctr">
               <a:lnSpc>
-                <a:spcPct val="124242"/>
+                <a:spcPct val="100000"/>
               </a:lnSpc>
               <a:spcBef>
                 <a:spcPts val="0"/>
@@ -24327,12 +24297,12 @@
               <a:buClr>
                 <a:srgbClr val="272525"/>
               </a:buClr>
-              <a:buSzPts val="1106"/>
+              <a:buSzPts val="2950"/>
               <a:buFont typeface="Inter"/>
               <a:buNone/>
             </a:pPr>
             <a:r>
-              <a:rPr b="1" i="0" lang="en-GB" sz="1106" u="none" cap="none" strike="noStrike">
+              <a:rPr b="1" i="0" lang="en-GB" sz="2950" u="none" cap="none" strike="noStrike">
                 <a:solidFill>
                   <a:srgbClr val="272525"/>
                 </a:solidFill>
@@ -24341,9 +24311,9 @@
                 <a:cs typeface="Inter"/>
                 <a:sym typeface="Inter"/>
               </a:rPr>
-              <a:t>Top score</a:t>
-            </a:r>
-            <a:endParaRPr b="0" i="0" sz="1106" u="none" cap="none" strike="noStrike"/>
+              <a:t>2.20</a:t>
+            </a:r>
+            <a:endParaRPr b="0" i="0" sz="2950" u="none" cap="none" strike="noStrike"/>
           </a:p>
         </p:txBody>
       </p:sp>
@@ -24355,8 +24325,8 @@
         </p:nvSpPr>
         <p:spPr>
           <a:xfrm>
-            <a:off x="1333341" y="3171050"/>
-            <a:ext cx="1503600" cy="307200"/>
+            <a:off x="1373739" y="2915006"/>
+            <a:ext cx="1422600" cy="177900"/>
           </a:xfrm>
           <a:prstGeom prst="rect">
             <a:avLst/>
@@ -24374,7 +24344,7 @@
           <a:p>
             <a:pPr indent="0" lvl="0" marL="0" marR="0" rtl="0" algn="ctr">
               <a:lnSpc>
-                <a:spcPct val="138461"/>
+                <a:spcPct val="124242"/>
               </a:lnSpc>
               <a:spcBef>
                 <a:spcPts val="0"/>
@@ -24385,12 +24355,12 @@
               <a:buClr>
                 <a:srgbClr val="272525"/>
               </a:buClr>
-              <a:buSzPts val="872"/>
+              <a:buSzPts val="1106"/>
               <a:buFont typeface="Inter"/>
               <a:buNone/>
             </a:pPr>
             <a:r>
-              <a:rPr b="0" i="0" lang="en-GB" sz="872" u="none" cap="none" strike="noStrike">
+              <a:rPr b="1" i="0" lang="en-GB" sz="1106" u="none" cap="none" strike="noStrike">
                 <a:solidFill>
                   <a:srgbClr val="272525"/>
                 </a:solidFill>
@@ -24399,9 +24369,9 @@
                 <a:cs typeface="Inter"/>
                 <a:sym typeface="Inter"/>
               </a:rPr>
-              <a:t>#1 Studio Apartment · Zürich</a:t>
-            </a:r>
-            <a:endParaRPr b="0" i="0" sz="872" u="none" cap="none" strike="noStrike"/>
+              <a:t>Top score</a:t>
+            </a:r>
+            <a:endParaRPr b="0" i="0" sz="1106" u="none" cap="none" strike="noStrike"/>
           </a:p>
         </p:txBody>
       </p:sp>
@@ -24413,8 +24383,8 @@
         </p:nvSpPr>
         <p:spPr>
           <a:xfrm>
-            <a:off x="2934665" y="2423915"/>
-            <a:ext cx="1503600" cy="375600"/>
+            <a:off x="1333341" y="3171050"/>
+            <a:ext cx="1503600" cy="307200"/>
           </a:xfrm>
           <a:prstGeom prst="rect">
             <a:avLst/>
@@ -24432,7 +24402,7 @@
           <a:p>
             <a:pPr indent="0" lvl="0" marL="0" marR="0" rtl="0" algn="ctr">
               <a:lnSpc>
-                <a:spcPct val="100000"/>
+                <a:spcPct val="138461"/>
               </a:lnSpc>
               <a:spcBef>
                 <a:spcPts val="0"/>
@@ -24443,12 +24413,12 @@
               <a:buClr>
                 <a:srgbClr val="272525"/>
               </a:buClr>
-              <a:buSzPts val="2950"/>
+              <a:buSzPts val="872"/>
               <a:buFont typeface="Inter"/>
               <a:buNone/>
             </a:pPr>
             <a:r>
-              <a:rPr b="1" i="0" lang="en-GB" sz="2950" u="none" cap="none" strike="noStrike">
+              <a:rPr b="0" i="0" lang="en-GB" sz="872" u="none" cap="none" strike="noStrike">
                 <a:solidFill>
                   <a:srgbClr val="272525"/>
                 </a:solidFill>
@@ -24457,9 +24427,9 @@
                 <a:cs typeface="Inter"/>
                 <a:sym typeface="Inter"/>
               </a:rPr>
-              <a:t>1.66</a:t>
-            </a:r>
-            <a:endParaRPr b="0" i="0" sz="2950" u="none" cap="none" strike="noStrike"/>
+              <a:t>#1 Studio Apartment · Zürich</a:t>
+            </a:r>
+            <a:endParaRPr b="0" i="0" sz="872" u="none" cap="none" strike="noStrike"/>
           </a:p>
         </p:txBody>
       </p:sp>
@@ -24471,8 +24441,8 @@
         </p:nvSpPr>
         <p:spPr>
           <a:xfrm>
-            <a:off x="2975064" y="2915006"/>
-            <a:ext cx="1422600" cy="177900"/>
+            <a:off x="2934665" y="2423915"/>
+            <a:ext cx="1503600" cy="375600"/>
           </a:xfrm>
           <a:prstGeom prst="rect">
             <a:avLst/>
@@ -24490,7 +24460,7 @@
           <a:p>
             <a:pPr indent="0" lvl="0" marL="0" marR="0" rtl="0" algn="ctr">
               <a:lnSpc>
-                <a:spcPct val="124242"/>
+                <a:spcPct val="100000"/>
               </a:lnSpc>
               <a:spcBef>
                 <a:spcPts val="0"/>
@@ -24501,12 +24471,12 @@
               <a:buClr>
                 <a:srgbClr val="272525"/>
               </a:buClr>
-              <a:buSzPts val="1106"/>
+              <a:buSzPts val="2950"/>
               <a:buFont typeface="Inter"/>
               <a:buNone/>
             </a:pPr>
             <a:r>
-              <a:rPr b="1" i="0" lang="en-GB" sz="1106" u="none" cap="none" strike="noStrike">
+              <a:rPr b="1" i="0" lang="en-GB" sz="2950" u="none" cap="none" strike="noStrike">
                 <a:solidFill>
                   <a:srgbClr val="272525"/>
                 </a:solidFill>
@@ -24515,9 +24485,9 @@
                 <a:cs typeface="Inter"/>
                 <a:sym typeface="Inter"/>
               </a:rPr>
-              <a:t>Runner-up</a:t>
-            </a:r>
-            <a:endParaRPr b="0" i="0" sz="1106" u="none" cap="none" strike="noStrike"/>
+              <a:t>1.66</a:t>
+            </a:r>
+            <a:endParaRPr b="0" i="0" sz="2950" u="none" cap="none" strike="noStrike"/>
           </a:p>
         </p:txBody>
       </p:sp>
@@ -24529,8 +24499,8 @@
         </p:nvSpPr>
         <p:spPr>
           <a:xfrm>
-            <a:off x="2934665" y="3171050"/>
-            <a:ext cx="1503600" cy="153600"/>
+            <a:off x="2975064" y="2915006"/>
+            <a:ext cx="1422600" cy="177900"/>
           </a:xfrm>
           <a:prstGeom prst="rect">
             <a:avLst/>
@@ -24548,6 +24518,64 @@
           <a:p>
             <a:pPr indent="0" lvl="0" marL="0" marR="0" rtl="0" algn="ctr">
               <a:lnSpc>
+                <a:spcPct val="124242"/>
+              </a:lnSpc>
+              <a:spcBef>
+                <a:spcPts val="0"/>
+              </a:spcBef>
+              <a:spcAft>
+                <a:spcPts val="0"/>
+              </a:spcAft>
+              <a:buClr>
+                <a:srgbClr val="272525"/>
+              </a:buClr>
+              <a:buSzPts val="1106"/>
+              <a:buFont typeface="Inter"/>
+              <a:buNone/>
+            </a:pPr>
+            <a:r>
+              <a:rPr b="1" i="0" lang="en-GB" sz="1106" u="none" cap="none" strike="noStrike">
+                <a:solidFill>
+                  <a:srgbClr val="272525"/>
+                </a:solidFill>
+                <a:latin typeface="Inter"/>
+                <a:ea typeface="Inter"/>
+                <a:cs typeface="Inter"/>
+                <a:sym typeface="Inter"/>
+              </a:rPr>
+              <a:t>Runner-up</a:t>
+            </a:r>
+            <a:endParaRPr b="0" i="0" sz="1106" u="none" cap="none" strike="noStrike"/>
+          </a:p>
+        </p:txBody>
+      </p:sp>
+      <p:sp>
+        <p:nvSpPr>
+          <p:cNvPr id="284" name="Google Shape;284;p33"/>
+          <p:cNvSpPr/>
+          <p:nvPr/>
+        </p:nvSpPr>
+        <p:spPr>
+          <a:xfrm>
+            <a:off x="2934665" y="3171050"/>
+            <a:ext cx="1503600" cy="153600"/>
+          </a:xfrm>
+          <a:prstGeom prst="rect">
+            <a:avLst/>
+          </a:prstGeom>
+          <a:noFill/>
+          <a:ln>
+            <a:noFill/>
+          </a:ln>
+        </p:spPr>
+        <p:txBody>
+          <a:bodyPr anchorCtr="0" anchor="t" bIns="0" lIns="0" spcFirstLastPara="1" rIns="0" wrap="square" tIns="0">
+            <a:noAutofit/>
+          </a:bodyPr>
+          <a:lstStyle/>
+          <a:p>
+            <a:pPr indent="0" lvl="0" marL="0" marR="0" rtl="0" algn="ctr">
+              <a:lnSpc>
                 <a:spcPct val="138461"/>
               </a:lnSpc>
               <a:spcBef>
@@ -24581,7 +24609,7 @@
       </p:sp>
       <p:sp>
         <p:nvSpPr>
-          <p:cNvPr id="284" name="Google Shape;284;p33"/>
+          <p:cNvPr id="285" name="Google Shape;285;p33"/>
           <p:cNvSpPr/>
           <p:nvPr/>
         </p:nvSpPr>
@@ -24632,7 +24660,7 @@
       </p:sp>
       <p:sp>
         <p:nvSpPr>
-          <p:cNvPr id="285" name="Google Shape;285;p33"/>
+          <p:cNvPr id="286" name="Google Shape;286;p33"/>
           <p:cNvSpPr/>
           <p:nvPr/>
         </p:nvSpPr>
@@ -24677,7 +24705,7 @@
       </p:sp>
       <p:sp>
         <p:nvSpPr>
-          <p:cNvPr id="286" name="Google Shape;286;p33"/>
+          <p:cNvPr id="287" name="Google Shape;287;p33"/>
           <p:cNvSpPr/>
           <p:nvPr/>
         </p:nvSpPr>
@@ -24735,7 +24763,7 @@
       </p:sp>
       <p:sp>
         <p:nvSpPr>
-          <p:cNvPr id="287" name="Google Shape;287;p33"/>
+          <p:cNvPr id="288" name="Google Shape;288;p33"/>
           <p:cNvSpPr/>
           <p:nvPr/>
         </p:nvSpPr>
@@ -24793,7 +24821,7 @@
       </p:sp>
       <p:sp>
         <p:nvSpPr>
-          <p:cNvPr id="288" name="Google Shape;288;p33"/>
+          <p:cNvPr id="289" name="Google Shape;289;p33"/>
           <p:cNvSpPr/>
           <p:nvPr/>
         </p:nvSpPr>
@@ -24838,7 +24866,7 @@
       </p:sp>
       <p:pic>
         <p:nvPicPr>
-          <p:cNvPr descr="preencoded.png" id="289" name="Google Shape;289;p33"/>
+          <p:cNvPr descr="preencoded.png" id="290" name="Google Shape;290;p33"/>
           <p:cNvPicPr preferRelativeResize="0"/>
           <p:nvPr/>
         </p:nvPicPr>
@@ -24865,7 +24893,7 @@
       </p:pic>
       <p:sp>
         <p:nvSpPr>
-          <p:cNvPr id="290" name="Google Shape;290;p33"/>
+          <p:cNvPr id="291" name="Google Shape;291;p33"/>
           <p:cNvSpPr/>
           <p:nvPr/>
         </p:nvSpPr>
@@ -24918,64 +24946,6 @@
               <a:t>WARM SEARCH</a:t>
             </a:r>
             <a:endParaRPr b="0" i="0" sz="1106" u="none" cap="none" strike="noStrike"/>
-          </a:p>
-        </p:txBody>
-      </p:sp>
-      <p:sp>
-        <p:nvSpPr>
-          <p:cNvPr id="291" name="Google Shape;291;p33"/>
-          <p:cNvSpPr/>
-          <p:nvPr/>
-        </p:nvSpPr>
-        <p:spPr>
-          <a:xfrm>
-            <a:off x="5126397" y="1998132"/>
-            <a:ext cx="2586000" cy="153600"/>
-          </a:xfrm>
-          <a:prstGeom prst="rect">
-            <a:avLst/>
-          </a:prstGeom>
-          <a:noFill/>
-          <a:ln>
-            <a:noFill/>
-          </a:ln>
-        </p:spPr>
-        <p:txBody>
-          <a:bodyPr anchorCtr="0" anchor="t" bIns="0" lIns="0" spcFirstLastPara="1" rIns="0" wrap="square" tIns="0">
-            <a:noAutofit/>
-          </a:bodyPr>
-          <a:lstStyle/>
-          <a:p>
-            <a:pPr indent="0" lvl="0" marL="0" marR="0" rtl="0" algn="l">
-              <a:lnSpc>
-                <a:spcPct val="138461"/>
-              </a:lnSpc>
-              <a:spcBef>
-                <a:spcPts val="0"/>
-              </a:spcBef>
-              <a:spcAft>
-                <a:spcPts val="0"/>
-              </a:spcAft>
-              <a:buClr>
-                <a:srgbClr val="000000"/>
-              </a:buClr>
-              <a:buSzPts val="872"/>
-              <a:buFont typeface="Inter"/>
-              <a:buNone/>
-            </a:pPr>
-            <a:r>
-              <a:rPr b="0" i="0" lang="en-GB" sz="872" u="none" cap="none" strike="noStrike">
-                <a:solidFill>
-                  <a:srgbClr val="000000"/>
-                </a:solidFill>
-                <a:latin typeface="Inter"/>
-                <a:ea typeface="Inter"/>
-                <a:cs typeface="Inter"/>
-                <a:sym typeface="Inter"/>
-              </a:rPr>
-              <a:t>Profile-aware ranking</a:t>
-            </a:r>
-            <a:endParaRPr b="0" i="0" sz="872" u="none" cap="none" strike="noStrike"/>
           </a:p>
         </p:txBody>
       </p:sp>
@@ -24987,8 +24957,8 @@
         </p:nvSpPr>
         <p:spPr>
           <a:xfrm>
-            <a:off x="4721056" y="2423915"/>
-            <a:ext cx="1503600" cy="375600"/>
+            <a:off x="5126397" y="1998132"/>
+            <a:ext cx="2586000" cy="153600"/>
           </a:xfrm>
           <a:prstGeom prst="rect">
             <a:avLst/>
@@ -25004,9 +24974,9 @@
           </a:bodyPr>
           <a:lstStyle/>
           <a:p>
-            <a:pPr indent="0" lvl="0" marL="0" marR="0" rtl="0" algn="ctr">
-              <a:lnSpc>
-                <a:spcPct val="100000"/>
+            <a:pPr indent="0" lvl="0" marL="0" marR="0" rtl="0" algn="l">
+              <a:lnSpc>
+                <a:spcPct val="138461"/>
               </a:lnSpc>
               <a:spcBef>
                 <a:spcPts val="0"/>
@@ -25015,25 +24985,25 @@
                 <a:spcPts val="0"/>
               </a:spcAft>
               <a:buClr>
-                <a:srgbClr val="272525"/>
+                <a:srgbClr val="000000"/>
               </a:buClr>
-              <a:buSzPts val="2950"/>
+              <a:buSzPts val="872"/>
               <a:buFont typeface="Inter"/>
               <a:buNone/>
             </a:pPr>
             <a:r>
-              <a:rPr b="1" i="0" lang="en-GB" sz="2950" u="none" cap="none" strike="noStrike">
-                <a:solidFill>
-                  <a:srgbClr val="272525"/>
+              <a:rPr b="0" i="0" lang="en-GB" sz="872" u="none" cap="none" strike="noStrike">
+                <a:solidFill>
+                  <a:srgbClr val="000000"/>
                 </a:solidFill>
                 <a:latin typeface="Inter"/>
                 <a:ea typeface="Inter"/>
                 <a:cs typeface="Inter"/>
                 <a:sym typeface="Inter"/>
               </a:rPr>
-              <a:t>2.35</a:t>
-            </a:r>
-            <a:endParaRPr b="0" i="0" sz="2950" u="none" cap="none" strike="noStrike"/>
+              <a:t>Profile-aware ranking</a:t>
+            </a:r>
+            <a:endParaRPr b="0" i="0" sz="872" u="none" cap="none" strike="noStrike"/>
           </a:p>
         </p:txBody>
       </p:sp>
@@ -25045,8 +25015,8 @@
         </p:nvSpPr>
         <p:spPr>
           <a:xfrm>
-            <a:off x="4761454" y="2915006"/>
-            <a:ext cx="1422600" cy="177900"/>
+            <a:off x="4721056" y="2423915"/>
+            <a:ext cx="1503600" cy="375600"/>
           </a:xfrm>
           <a:prstGeom prst="rect">
             <a:avLst/>
@@ -25064,7 +25034,7 @@
           <a:p>
             <a:pPr indent="0" lvl="0" marL="0" marR="0" rtl="0" algn="ctr">
               <a:lnSpc>
-                <a:spcPct val="124242"/>
+                <a:spcPct val="100000"/>
               </a:lnSpc>
               <a:spcBef>
                 <a:spcPts val="0"/>
@@ -25075,12 +25045,12 @@
               <a:buClr>
                 <a:srgbClr val="272525"/>
               </a:buClr>
-              <a:buSzPts val="1106"/>
+              <a:buSzPts val="2950"/>
               <a:buFont typeface="Inter"/>
               <a:buNone/>
             </a:pPr>
             <a:r>
-              <a:rPr b="1" i="0" lang="en-GB" sz="1106" u="none" cap="none" strike="noStrike">
+              <a:rPr b="1" i="0" lang="en-GB" sz="2950" u="none" cap="none" strike="noStrike">
                 <a:solidFill>
                   <a:srgbClr val="272525"/>
                 </a:solidFill>
@@ -25089,9 +25059,9 @@
                 <a:cs typeface="Inter"/>
                 <a:sym typeface="Inter"/>
               </a:rPr>
-              <a:t>Top score</a:t>
-            </a:r>
-            <a:endParaRPr b="0" i="0" sz="1106" u="none" cap="none" strike="noStrike"/>
+              <a:t>2.35</a:t>
+            </a:r>
+            <a:endParaRPr b="0" i="0" sz="2950" u="none" cap="none" strike="noStrike"/>
           </a:p>
         </p:txBody>
       </p:sp>
@@ -25103,8 +25073,8 @@
         </p:nvSpPr>
         <p:spPr>
           <a:xfrm>
-            <a:off x="4721056" y="3171050"/>
-            <a:ext cx="1503600" cy="307200"/>
+            <a:off x="4761454" y="2915006"/>
+            <a:ext cx="1422600" cy="177900"/>
           </a:xfrm>
           <a:prstGeom prst="rect">
             <a:avLst/>
@@ -25122,7 +25092,7 @@
           <a:p>
             <a:pPr indent="0" lvl="0" marL="0" marR="0" rtl="0" algn="ctr">
               <a:lnSpc>
-                <a:spcPct val="138461"/>
+                <a:spcPct val="124242"/>
               </a:lnSpc>
               <a:spcBef>
                 <a:spcPts val="0"/>
@@ -25133,12 +25103,12 @@
               <a:buClr>
                 <a:srgbClr val="272525"/>
               </a:buClr>
-              <a:buSzPts val="872"/>
+              <a:buSzPts val="1106"/>
               <a:buFont typeface="Inter"/>
               <a:buNone/>
             </a:pPr>
             <a:r>
-              <a:rPr b="0" i="0" lang="en-GB" sz="872" u="none" cap="none" strike="noStrike">
+              <a:rPr b="1" i="0" lang="en-GB" sz="1106" u="none" cap="none" strike="noStrike">
                 <a:solidFill>
                   <a:srgbClr val="272525"/>
                 </a:solidFill>
@@ -25147,9 +25117,9 @@
                 <a:cs typeface="Inter"/>
                 <a:sym typeface="Inter"/>
               </a:rPr>
-              <a:t>#1 Studio Apartment · Zürich</a:t>
-            </a:r>
-            <a:endParaRPr b="0" i="0" sz="872" u="none" cap="none" strike="noStrike"/>
+              <a:t>Top score</a:t>
+            </a:r>
+            <a:endParaRPr b="0" i="0" sz="1106" u="none" cap="none" strike="noStrike"/>
           </a:p>
         </p:txBody>
       </p:sp>
@@ -25161,8 +25131,8 @@
         </p:nvSpPr>
         <p:spPr>
           <a:xfrm>
-            <a:off x="6322381" y="2423915"/>
-            <a:ext cx="1503600" cy="375600"/>
+            <a:off x="4721056" y="3171050"/>
+            <a:ext cx="1503600" cy="307200"/>
           </a:xfrm>
           <a:prstGeom prst="rect">
             <a:avLst/>
@@ -25180,7 +25150,7 @@
           <a:p>
             <a:pPr indent="0" lvl="0" marL="0" marR="0" rtl="0" algn="ctr">
               <a:lnSpc>
-                <a:spcPct val="100000"/>
+                <a:spcPct val="138461"/>
               </a:lnSpc>
               <a:spcBef>
                 <a:spcPts val="0"/>
@@ -25191,12 +25161,12 @@
               <a:buClr>
                 <a:srgbClr val="272525"/>
               </a:buClr>
-              <a:buSzPts val="2950"/>
+              <a:buSzPts val="872"/>
               <a:buFont typeface="Inter"/>
               <a:buNone/>
             </a:pPr>
             <a:r>
-              <a:rPr b="1" i="0" lang="en-GB" sz="2950" u="none" cap="none" strike="noStrike">
+              <a:rPr b="0" i="0" lang="en-GB" sz="872" u="none" cap="none" strike="noStrike">
                 <a:solidFill>
                   <a:srgbClr val="272525"/>
                 </a:solidFill>
@@ -25205,9 +25175,9 @@
                 <a:cs typeface="Inter"/>
                 <a:sym typeface="Inter"/>
               </a:rPr>
-              <a:t>1.78</a:t>
-            </a:r>
-            <a:endParaRPr b="0" i="0" sz="2950" u="none" cap="none" strike="noStrike"/>
+              <a:t>#1 Studio Apartment · Zürich</a:t>
+            </a:r>
+            <a:endParaRPr b="0" i="0" sz="872" u="none" cap="none" strike="noStrike"/>
           </a:p>
         </p:txBody>
       </p:sp>
@@ -25219,8 +25189,8 @@
         </p:nvSpPr>
         <p:spPr>
           <a:xfrm>
-            <a:off x="6362779" y="2915006"/>
-            <a:ext cx="1422600" cy="177900"/>
+            <a:off x="6322381" y="2423915"/>
+            <a:ext cx="1503600" cy="375600"/>
           </a:xfrm>
           <a:prstGeom prst="rect">
             <a:avLst/>
@@ -25238,7 +25208,7 @@
           <a:p>
             <a:pPr indent="0" lvl="0" marL="0" marR="0" rtl="0" algn="ctr">
               <a:lnSpc>
-                <a:spcPct val="124242"/>
+                <a:spcPct val="100000"/>
               </a:lnSpc>
               <a:spcBef>
                 <a:spcPts val="0"/>
@@ -25249,12 +25219,12 @@
               <a:buClr>
                 <a:srgbClr val="272525"/>
               </a:buClr>
-              <a:buSzPts val="1106"/>
+              <a:buSzPts val="2950"/>
               <a:buFont typeface="Inter"/>
               <a:buNone/>
             </a:pPr>
             <a:r>
-              <a:rPr b="1" i="0" lang="en-GB" sz="1106" u="none" cap="none" strike="noStrike">
+              <a:rPr b="1" i="0" lang="en-GB" sz="2950" u="none" cap="none" strike="noStrike">
                 <a:solidFill>
                   <a:srgbClr val="272525"/>
                 </a:solidFill>
@@ -25263,9 +25233,9 @@
                 <a:cs typeface="Inter"/>
                 <a:sym typeface="Inter"/>
               </a:rPr>
-              <a:t>Runner-up</a:t>
-            </a:r>
-            <a:endParaRPr b="0" i="0" sz="1106" u="none" cap="none" strike="noStrike"/>
+              <a:t>1.78</a:t>
+            </a:r>
+            <a:endParaRPr b="0" i="0" sz="2950" u="none" cap="none" strike="noStrike"/>
           </a:p>
         </p:txBody>
       </p:sp>
@@ -25277,8 +25247,8 @@
         </p:nvSpPr>
         <p:spPr>
           <a:xfrm>
-            <a:off x="6322381" y="3171050"/>
-            <a:ext cx="1503600" cy="153600"/>
+            <a:off x="6362779" y="2915006"/>
+            <a:ext cx="1422600" cy="177900"/>
           </a:xfrm>
           <a:prstGeom prst="rect">
             <a:avLst/>
@@ -25296,6 +25266,64 @@
           <a:p>
             <a:pPr indent="0" lvl="0" marL="0" marR="0" rtl="0" algn="ctr">
               <a:lnSpc>
+                <a:spcPct val="124242"/>
+              </a:lnSpc>
+              <a:spcBef>
+                <a:spcPts val="0"/>
+              </a:spcBef>
+              <a:spcAft>
+                <a:spcPts val="0"/>
+              </a:spcAft>
+              <a:buClr>
+                <a:srgbClr val="272525"/>
+              </a:buClr>
+              <a:buSzPts val="1106"/>
+              <a:buFont typeface="Inter"/>
+              <a:buNone/>
+            </a:pPr>
+            <a:r>
+              <a:rPr b="1" i="0" lang="en-GB" sz="1106" u="none" cap="none" strike="noStrike">
+                <a:solidFill>
+                  <a:srgbClr val="272525"/>
+                </a:solidFill>
+                <a:latin typeface="Inter"/>
+                <a:ea typeface="Inter"/>
+                <a:cs typeface="Inter"/>
+                <a:sym typeface="Inter"/>
+              </a:rPr>
+              <a:t>Runner-up</a:t>
+            </a:r>
+            <a:endParaRPr b="0" i="0" sz="1106" u="none" cap="none" strike="noStrike"/>
+          </a:p>
+        </p:txBody>
+      </p:sp>
+      <p:sp>
+        <p:nvSpPr>
+          <p:cNvPr id="298" name="Google Shape;298;p33"/>
+          <p:cNvSpPr/>
+          <p:nvPr/>
+        </p:nvSpPr>
+        <p:spPr>
+          <a:xfrm>
+            <a:off x="6322381" y="3171050"/>
+            <a:ext cx="1503600" cy="153600"/>
+          </a:xfrm>
+          <a:prstGeom prst="rect">
+            <a:avLst/>
+          </a:prstGeom>
+          <a:noFill/>
+          <a:ln>
+            <a:noFill/>
+          </a:ln>
+        </p:spPr>
+        <p:txBody>
+          <a:bodyPr anchorCtr="0" anchor="t" bIns="0" lIns="0" spcFirstLastPara="1" rIns="0" wrap="square" tIns="0">
+            <a:noAutofit/>
+          </a:bodyPr>
+          <a:lstStyle/>
+          <a:p>
+            <a:pPr indent="0" lvl="0" marL="0" marR="0" rtl="0" algn="ctr">
+              <a:lnSpc>
                 <a:spcPct val="138461"/>
               </a:lnSpc>
               <a:spcBef>
@@ -25329,7 +25357,7 @@
       </p:sp>
       <p:sp>
         <p:nvSpPr>
-          <p:cNvPr id="298" name="Google Shape;298;p33"/>
+          <p:cNvPr id="299" name="Google Shape;299;p33"/>
           <p:cNvSpPr/>
           <p:nvPr/>
         </p:nvSpPr>
@@ -25380,7 +25408,7 @@
       </p:sp>
       <p:sp>
         <p:nvSpPr>
-          <p:cNvPr id="299" name="Google Shape;299;p33"/>
+          <p:cNvPr id="300" name="Google Shape;300;p33"/>
           <p:cNvSpPr/>
           <p:nvPr/>
         </p:nvSpPr>
@@ -25425,7 +25453,7 @@
       </p:sp>
       <p:sp>
         <p:nvSpPr>
-          <p:cNvPr id="300" name="Google Shape;300;p33"/>
+          <p:cNvPr id="301" name="Google Shape;301;p33"/>
           <p:cNvSpPr/>
           <p:nvPr/>
         </p:nvSpPr>
@@ -25483,7 +25511,7 @@
       </p:sp>
       <p:sp>
         <p:nvSpPr>
-          <p:cNvPr id="301" name="Google Shape;301;p33"/>
+          <p:cNvPr id="302" name="Google Shape;302;p33"/>
           <p:cNvSpPr/>
           <p:nvPr/>
         </p:nvSpPr>
@@ -25541,7 +25569,7 @@
       </p:sp>
       <p:sp>
         <p:nvSpPr>
-          <p:cNvPr id="302" name="Google Shape;302;p33"/>
+          <p:cNvPr id="303" name="Google Shape;303;p33"/>
           <p:cNvSpPr/>
           <p:nvPr/>
         </p:nvSpPr>
@@ -25592,7 +25620,7 @@
       </p:sp>
       <p:sp>
         <p:nvSpPr>
-          <p:cNvPr id="303" name="Google Shape;303;p33"/>
+          <p:cNvPr id="304" name="Google Shape;304;p33"/>
           <p:cNvSpPr/>
           <p:nvPr/>
         </p:nvSpPr>
@@ -25637,7 +25665,7 @@
       </p:sp>
       <p:sp>
         <p:nvSpPr>
-          <p:cNvPr id="304" name="Google Shape;304;p33"/>
+          <p:cNvPr id="305" name="Google Shape;305;p33"/>
           <p:cNvSpPr/>
           <p:nvPr/>
         </p:nvSpPr>
@@ -25707,7 +25735,7 @@
       </p:sp>
       <p:sp>
         <p:nvSpPr>
-          <p:cNvPr id="305" name="Google Shape;305;p33"/>
+          <p:cNvPr id="306" name="Google Shape;306;p33"/>
           <p:cNvSpPr/>
           <p:nvPr/>
         </p:nvSpPr>
@@ -25750,7 +25778,7 @@
       </p:sp>
       <p:sp>
         <p:nvSpPr>
-          <p:cNvPr id="306" name="Google Shape;306;p33"/>
+          <p:cNvPr id="307" name="Google Shape;307;p33"/>
           <p:cNvSpPr/>
           <p:nvPr/>
         </p:nvSpPr>
@@ -25795,7 +25823,7 @@
       </p:sp>
       <p:sp>
         <p:nvSpPr>
-          <p:cNvPr id="307" name="Google Shape;307;p33"/>
+          <p:cNvPr id="308" name="Google Shape;308;p33"/>
           <p:cNvSpPr/>
           <p:nvPr/>
         </p:nvSpPr>
@@ -25865,7 +25893,7 @@
       </p:sp>
       <p:sp>
         <p:nvSpPr>
-          <p:cNvPr id="308" name="Google Shape;308;p33"/>
+          <p:cNvPr id="309" name="Google Shape;309;p33"/>
           <p:cNvSpPr/>
           <p:nvPr/>
         </p:nvSpPr>
@@ -25908,7 +25936,7 @@
       </p:sp>
       <p:sp>
         <p:nvSpPr>
-          <p:cNvPr id="309" name="Google Shape;309;p33"/>
+          <p:cNvPr id="310" name="Google Shape;310;p33"/>
           <p:cNvSpPr/>
           <p:nvPr/>
         </p:nvSpPr>
@@ -25953,7 +25981,7 @@
       </p:sp>
       <p:sp>
         <p:nvSpPr>
-          <p:cNvPr id="310" name="Google Shape;310;p33"/>
+          <p:cNvPr id="311" name="Google Shape;311;p33"/>
           <p:cNvSpPr/>
           <p:nvPr/>
         </p:nvSpPr>
